--- a/public/lessons/year-6-maths/summer/week-21/use-simple-formulae/teaching-powerpoint-v1.pptx
+++ b/public/lessons/year-6-maths/summer/week-21/use-simple-formulae/teaching-powerpoint-v1.pptx
@@ -2,24 +2,24 @@
 <file path=ppt/presentation.xml><?xml version="1.0" encoding="utf-8"?>
 <p:presentation xmlns:p="http://schemas.openxmlformats.org/presentationml/2006/main">
   <p:sldMasterIdLst>
-    <p:sldMasterId xmlns:r="http://schemas.openxmlformats.org/officeDocument/2006/relationships" id="2147483648" r:id="R039dcbc8bc5d47a6"/>
+    <p:sldMasterId xmlns:r="http://schemas.openxmlformats.org/officeDocument/2006/relationships" id="2147483648" r:id="Red6edfa0921f4f0d"/>
   </p:sldMasterIdLst>
   <p:notesMasterIdLst>
-    <p:notesMasterId xmlns:r="http://schemas.openxmlformats.org/officeDocument/2006/relationships" r:id="R175628ee40884b9c"/>
+    <p:notesMasterId xmlns:r="http://schemas.openxmlformats.org/officeDocument/2006/relationships" r:id="R9c5cb2e8608143e6"/>
   </p:notesMasterIdLst>
   <p:sldIdLst>
-    <p:sldId xmlns:r="http://schemas.openxmlformats.org/officeDocument/2006/relationships" id="256" r:id="R69346a001de14f73"/>
-    <p:sldId xmlns:r="http://schemas.openxmlformats.org/officeDocument/2006/relationships" id="257" r:id="R1a839914827c4562"/>
-    <p:sldId xmlns:r="http://schemas.openxmlformats.org/officeDocument/2006/relationships" id="258" r:id="R5e6ad67adadf4266"/>
-    <p:sldId xmlns:r="http://schemas.openxmlformats.org/officeDocument/2006/relationships" id="259" r:id="R3b202a1417d14d77"/>
-    <p:sldId xmlns:r="http://schemas.openxmlformats.org/officeDocument/2006/relationships" id="260" r:id="R8de1d5aa506c4283"/>
-    <p:sldId xmlns:r="http://schemas.openxmlformats.org/officeDocument/2006/relationships" id="261" r:id="R3fa181dc21ca40dd"/>
-    <p:sldId xmlns:r="http://schemas.openxmlformats.org/officeDocument/2006/relationships" id="262" r:id="Rf19e8b1384a84d2a"/>
-    <p:sldId xmlns:r="http://schemas.openxmlformats.org/officeDocument/2006/relationships" id="263" r:id="R8114280703e949cf"/>
-    <p:sldId xmlns:r="http://schemas.openxmlformats.org/officeDocument/2006/relationships" id="264" r:id="Ra58b347bfed64f6a"/>
-    <p:sldId xmlns:r="http://schemas.openxmlformats.org/officeDocument/2006/relationships" id="265" r:id="R319344bf5c044c1d"/>
-    <p:sldId xmlns:r="http://schemas.openxmlformats.org/officeDocument/2006/relationships" id="266" r:id="R8b283aaebff84f50"/>
-    <p:sldId xmlns:r="http://schemas.openxmlformats.org/officeDocument/2006/relationships" id="267" r:id="Ra1f14443d9744dda"/>
+    <p:sldId xmlns:r="http://schemas.openxmlformats.org/officeDocument/2006/relationships" id="256" r:id="R20357cbbaa224213"/>
+    <p:sldId xmlns:r="http://schemas.openxmlformats.org/officeDocument/2006/relationships" id="257" r:id="Rfce4f388177a48a2"/>
+    <p:sldId xmlns:r="http://schemas.openxmlformats.org/officeDocument/2006/relationships" id="258" r:id="Rf2137b33251d46a6"/>
+    <p:sldId xmlns:r="http://schemas.openxmlformats.org/officeDocument/2006/relationships" id="259" r:id="R51f1a1c5b15442f6"/>
+    <p:sldId xmlns:r="http://schemas.openxmlformats.org/officeDocument/2006/relationships" id="260" r:id="R4c3db22628d54bdb"/>
+    <p:sldId xmlns:r="http://schemas.openxmlformats.org/officeDocument/2006/relationships" id="261" r:id="R52eaf089e600438e"/>
+    <p:sldId xmlns:r="http://schemas.openxmlformats.org/officeDocument/2006/relationships" id="262" r:id="R5d69f2ea8e824000"/>
+    <p:sldId xmlns:r="http://schemas.openxmlformats.org/officeDocument/2006/relationships" id="263" r:id="Rf295a81e22ff4f5a"/>
+    <p:sldId xmlns:r="http://schemas.openxmlformats.org/officeDocument/2006/relationships" id="264" r:id="Raf63b76824424b02"/>
+    <p:sldId xmlns:r="http://schemas.openxmlformats.org/officeDocument/2006/relationships" id="265" r:id="R8ea87935f9d448ed"/>
+    <p:sldId xmlns:r="http://schemas.openxmlformats.org/officeDocument/2006/relationships" id="266" r:id="Rd9fc399305804971"/>
+    <p:sldId xmlns:r="http://schemas.openxmlformats.org/officeDocument/2006/relationships" id="267" r:id="Raf0766f20ed94f2b"/>
   </p:sldIdLst>
   <p:sldSz cx="12192000" cy="6858000"/>
   <p:notesSz cx="6858000" cy="9144000"/>
@@ -873,7 +873,7 @@
           <a:lstStyle xmlns:a="http://schemas.openxmlformats.org/drawingml/2006/main"/>
           <a:p xmlns:a="http://schemas.openxmlformats.org/drawingml/2006/main">
             <a:r>
-              <a:t>I do. Reveal the question, setup and each calculation stage one click at a time. Pupils watch before copying. Model answer: C = 6n + 4.</a:t>
+              <a:t>I do. Reveal the question, then reveal each mathematical change one click at a time. Point to the numbers and operation that changed before moving to the next line. Final answer: C = 6n + 4.</a:t>
             </a:r>
           </a:p>
         </p:txBody>
@@ -1291,7 +1291,7 @@
   </p:cSld>
   <p:clrMap bg1="lt1" tx1="dk1" bg2="lt2" tx2="dk2" accent1="accent1" accent2="accent2" accent3="accent3" accent4="accent4" accent5="accent5" accent6="accent6" hlink="hlink" folHlink="folHlink"/>
   <p:sldLayoutIdLst>
-    <p:sldLayoutId xmlns:r="http://schemas.openxmlformats.org/officeDocument/2006/relationships" id="2147483649" r:id="Rc9892696bb0f4a28"/>
+    <p:sldLayoutId xmlns:r="http://schemas.openxmlformats.org/officeDocument/2006/relationships" id="2147483649" r:id="Re3d6e273eebe4a1b"/>
   </p:sldLayoutIdLst>
   <p:txStyles>
     <p:titleStyle>
@@ -1842,7 +1842,7 @@
           <p:cNvPr id="12" name="">
             <a:extLst xmlns:a="http://schemas.openxmlformats.org/drawingml/2006/main">
               <a:ext uri="{FF2B5EF4-FFF2-40B4-BE49-F238E27FC236}">
-                <a16:creationId xmlns:a16="http://schemas.microsoft.com/office/drawing/2014/main" id="{E972F9B2-A878-46FB-B6A8-8AF476DE68B7}"/>
+                <a16:creationId xmlns:a16="http://schemas.microsoft.com/office/drawing/2014/main" id="{FA67DE27-3DB5-499C-924D-6F6AE3B7929F}"/>
               </a:ext>
             </a:extLst>
           </p:cNvPr>
@@ -1874,7 +1874,7 @@
           <p:cNvPr id="2" name="">
             <a:extLst xmlns:a="http://schemas.openxmlformats.org/drawingml/2006/main">
               <a:ext uri="{FF2B5EF4-FFF2-40B4-BE49-F238E27FC236}">
-                <a16:creationId xmlns:a16="http://schemas.microsoft.com/office/drawing/2014/main" id="{5A2C008F-2567-496D-8504-202FE6B38A01}"/>
+                <a16:creationId xmlns:a16="http://schemas.microsoft.com/office/drawing/2014/main" id="{A0370A92-CFF2-4BE2-9A83-91B8B71C79B9}"/>
               </a:ext>
             </a:extLst>
           </p:cNvPr>
@@ -1931,7 +1931,7 @@
           <p:cNvPr id="3" name="">
             <a:extLst xmlns:a="http://schemas.openxmlformats.org/drawingml/2006/main">
               <a:ext uri="{FF2B5EF4-FFF2-40B4-BE49-F238E27FC236}">
-                <a16:creationId xmlns:a16="http://schemas.microsoft.com/office/drawing/2014/main" id="{E6C5D63D-072D-4A5F-A12A-E2FD5300F321}"/>
+                <a16:creationId xmlns:a16="http://schemas.microsoft.com/office/drawing/2014/main" id="{39EC2C95-53D6-48CB-95A3-F7916CD599B8}"/>
               </a:ext>
             </a:extLst>
           </p:cNvPr>
@@ -1965,7 +1965,7 @@
           <p:cNvPr id="4" name="">
             <a:extLst xmlns:a="http://schemas.openxmlformats.org/drawingml/2006/main">
               <a:ext uri="{FF2B5EF4-FFF2-40B4-BE49-F238E27FC236}">
-                <a16:creationId xmlns:a16="http://schemas.microsoft.com/office/drawing/2014/main" id="{CEAA4B78-FA6D-4E65-AFED-F92B354EB333}"/>
+                <a16:creationId xmlns:a16="http://schemas.microsoft.com/office/drawing/2014/main" id="{C999967F-3EBC-4664-9955-E0C7939902FD}"/>
               </a:ext>
             </a:extLst>
           </p:cNvPr>
@@ -2022,7 +2022,7 @@
           <p:cNvPr id="5" name="">
             <a:extLst xmlns:a="http://schemas.openxmlformats.org/drawingml/2006/main">
               <a:ext uri="{FF2B5EF4-FFF2-40B4-BE49-F238E27FC236}">
-                <a16:creationId xmlns:a16="http://schemas.microsoft.com/office/drawing/2014/main" id="{4E8F6008-C432-4A59-AE5E-24C7A31E3961}"/>
+                <a16:creationId xmlns:a16="http://schemas.microsoft.com/office/drawing/2014/main" id="{15703FF5-C781-454F-AEF2-0FAF63C681B4}"/>
               </a:ext>
             </a:extLst>
           </p:cNvPr>
@@ -2079,7 +2079,7 @@
           <p:cNvPr id="6" name="">
             <a:extLst xmlns:a="http://schemas.openxmlformats.org/drawingml/2006/main">
               <a:ext uri="{FF2B5EF4-FFF2-40B4-BE49-F238E27FC236}">
-                <a16:creationId xmlns:a16="http://schemas.microsoft.com/office/drawing/2014/main" id="{C8A61D8C-A7C7-4819-9EBC-BAE8DE78945B}"/>
+                <a16:creationId xmlns:a16="http://schemas.microsoft.com/office/drawing/2014/main" id="{5C65C50C-4260-46AA-BB5E-730C37A34D9B}"/>
               </a:ext>
             </a:extLst>
           </p:cNvPr>
@@ -2113,7 +2113,7 @@
           <p:cNvPr id="7" name="">
             <a:extLst xmlns:a="http://schemas.openxmlformats.org/drawingml/2006/main">
               <a:ext uri="{FF2B5EF4-FFF2-40B4-BE49-F238E27FC236}">
-                <a16:creationId xmlns:a16="http://schemas.microsoft.com/office/drawing/2014/main" id="{140580CD-E7FD-4CB0-87FB-4F9BD0C04B9D}"/>
+                <a16:creationId xmlns:a16="http://schemas.microsoft.com/office/drawing/2014/main" id="{E44262A8-7A48-43B6-9136-59B465D7AA25}"/>
               </a:ext>
             </a:extLst>
           </p:cNvPr>
@@ -2170,7 +2170,7 @@
           <p:cNvPr id="8" name="">
             <a:extLst xmlns:a="http://schemas.openxmlformats.org/drawingml/2006/main">
               <a:ext uri="{FF2B5EF4-FFF2-40B4-BE49-F238E27FC236}">
-                <a16:creationId xmlns:a16="http://schemas.microsoft.com/office/drawing/2014/main" id="{B0FCA43D-A345-4330-81E3-EA28EDFEDA99}"/>
+                <a16:creationId xmlns:a16="http://schemas.microsoft.com/office/drawing/2014/main" id="{39F9DD5A-EEAC-46DB-89C8-CDB882F0383E}"/>
               </a:ext>
             </a:extLst>
           </p:cNvPr>
@@ -2227,7 +2227,7 @@
           <p:cNvPr id="9" name="">
             <a:extLst xmlns:a="http://schemas.openxmlformats.org/drawingml/2006/main">
               <a:ext uri="{FF2B5EF4-FFF2-40B4-BE49-F238E27FC236}">
-                <a16:creationId xmlns:a16="http://schemas.microsoft.com/office/drawing/2014/main" id="{ED46011A-51C9-44C4-B488-E6B30FC026A2}"/>
+                <a16:creationId xmlns:a16="http://schemas.microsoft.com/office/drawing/2014/main" id="{F9157FA5-7B09-4A49-9914-3C3B1F1AD4D4}"/>
               </a:ext>
             </a:extLst>
           </p:cNvPr>
@@ -2284,7 +2284,7 @@
           <p:cNvPr id="10" name="">
             <a:extLst xmlns:a="http://schemas.openxmlformats.org/drawingml/2006/main">
               <a:ext uri="{FF2B5EF4-FFF2-40B4-BE49-F238E27FC236}">
-                <a16:creationId xmlns:a16="http://schemas.microsoft.com/office/drawing/2014/main" id="{9856AA7C-9C8B-44BA-B03E-F83C26742F13}"/>
+                <a16:creationId xmlns:a16="http://schemas.microsoft.com/office/drawing/2014/main" id="{707869C3-52D3-4A5B-BB40-488B53FD633B}"/>
               </a:ext>
             </a:extLst>
           </p:cNvPr>
@@ -2341,7 +2341,7 @@
           <p:cNvPr id="11" name="">
             <a:extLst xmlns:a="http://schemas.openxmlformats.org/drawingml/2006/main">
               <a:ext uri="{FF2B5EF4-FFF2-40B4-BE49-F238E27FC236}">
-                <a16:creationId xmlns:a16="http://schemas.microsoft.com/office/drawing/2014/main" id="{B31D157D-C99D-4B26-925B-3687DE0FC69D}"/>
+                <a16:creationId xmlns:a16="http://schemas.microsoft.com/office/drawing/2014/main" id="{29DCE055-B57D-4247-8574-84E2F70C21C5}"/>
               </a:ext>
             </a:extLst>
           </p:cNvPr>
@@ -2396,7 +2396,7 @@
     </p:spTree>
     <p:extLst>
       <p:ext uri="{BB962C8B-B14F-4D97-AF65-F5344CB8AC3E}">
-        <p14:creationId xmlns:p14="http://schemas.microsoft.com/office/powerpoint/2010/main" val="1746635076"/>
+        <p14:creationId xmlns:p14="http://schemas.microsoft.com/office/powerpoint/2010/main" val="1847894367"/>
       </p:ext>
     </p:extLst>
   </p:cSld>
@@ -2427,7 +2427,7 @@
           <p:cNvPr id="14" name="">
             <a:extLst xmlns:a="http://schemas.openxmlformats.org/drawingml/2006/main">
               <a:ext uri="{FF2B5EF4-FFF2-40B4-BE49-F238E27FC236}">
-                <a16:creationId xmlns:a16="http://schemas.microsoft.com/office/drawing/2014/main" id="{7F7E8E98-EA3F-42BB-8794-B691017481AD}"/>
+                <a16:creationId xmlns:a16="http://schemas.microsoft.com/office/drawing/2014/main" id="{D33F5C27-6DAD-46F6-B5BB-F4B59DED9271}"/>
               </a:ext>
             </a:extLst>
           </p:cNvPr>
@@ -2459,7 +2459,7 @@
           <p:cNvPr id="2" name="">
             <a:extLst xmlns:a="http://schemas.openxmlformats.org/drawingml/2006/main">
               <a:ext uri="{FF2B5EF4-FFF2-40B4-BE49-F238E27FC236}">
-                <a16:creationId xmlns:a16="http://schemas.microsoft.com/office/drawing/2014/main" id="{320B1B3F-556B-4C4A-AB72-8907B5A0051D}"/>
+                <a16:creationId xmlns:a16="http://schemas.microsoft.com/office/drawing/2014/main" id="{29F8EAEF-4E8C-4C3F-878D-0AFEB6BC291C}"/>
               </a:ext>
             </a:extLst>
           </p:cNvPr>
@@ -2516,7 +2516,7 @@
           <p:cNvPr id="3" name="">
             <a:extLst xmlns:a="http://schemas.openxmlformats.org/drawingml/2006/main">
               <a:ext uri="{FF2B5EF4-FFF2-40B4-BE49-F238E27FC236}">
-                <a16:creationId xmlns:a16="http://schemas.microsoft.com/office/drawing/2014/main" id="{DC2AFB06-99F8-4458-BE4D-382DE0D2D578}"/>
+                <a16:creationId xmlns:a16="http://schemas.microsoft.com/office/drawing/2014/main" id="{2D983132-857C-420C-BC2E-F13BBD48A8F6}"/>
               </a:ext>
             </a:extLst>
           </p:cNvPr>
@@ -2548,7 +2548,7 @@
           <p:cNvPr id="4" name="">
             <a:extLst xmlns:a="http://schemas.openxmlformats.org/drawingml/2006/main">
               <a:ext uri="{FF2B5EF4-FFF2-40B4-BE49-F238E27FC236}">
-                <a16:creationId xmlns:a16="http://schemas.microsoft.com/office/drawing/2014/main" id="{C9F5DA4E-C56B-49AF-9B02-BC79EDD5F4F1}"/>
+                <a16:creationId xmlns:a16="http://schemas.microsoft.com/office/drawing/2014/main" id="{A7333352-FA19-4DC6-9648-C38C8416EAEE}"/>
               </a:ext>
             </a:extLst>
           </p:cNvPr>
@@ -2605,7 +2605,7 @@
           <p:cNvPr id="5" name="">
             <a:extLst xmlns:a="http://schemas.openxmlformats.org/drawingml/2006/main">
               <a:ext uri="{FF2B5EF4-FFF2-40B4-BE49-F238E27FC236}">
-                <a16:creationId xmlns:a16="http://schemas.microsoft.com/office/drawing/2014/main" id="{DE829A26-09DF-408D-9D24-C84856DA874C}"/>
+                <a16:creationId xmlns:a16="http://schemas.microsoft.com/office/drawing/2014/main" id="{D2D774CB-86EB-4F4A-9C56-AA7AB5080678}"/>
               </a:ext>
             </a:extLst>
           </p:cNvPr>
@@ -2662,7 +2662,7 @@
           <p:cNvPr id="6" name="">
             <a:extLst xmlns:a="http://schemas.openxmlformats.org/drawingml/2006/main">
               <a:ext uri="{FF2B5EF4-FFF2-40B4-BE49-F238E27FC236}">
-                <a16:creationId xmlns:a16="http://schemas.microsoft.com/office/drawing/2014/main" id="{FCE26211-EDAB-4F25-A514-37C9FCD89619}"/>
+                <a16:creationId xmlns:a16="http://schemas.microsoft.com/office/drawing/2014/main" id="{AAB0BB71-F88F-4F89-A7C1-350684369E34}"/>
               </a:ext>
             </a:extLst>
           </p:cNvPr>
@@ -2719,7 +2719,7 @@
           <p:cNvPr id="7" name="">
             <a:extLst xmlns:a="http://schemas.openxmlformats.org/drawingml/2006/main">
               <a:ext uri="{FF2B5EF4-FFF2-40B4-BE49-F238E27FC236}">
-                <a16:creationId xmlns:a16="http://schemas.microsoft.com/office/drawing/2014/main" id="{BEB01C2C-E308-4027-9D84-5456268285A7}"/>
+                <a16:creationId xmlns:a16="http://schemas.microsoft.com/office/drawing/2014/main" id="{7BC603D2-3BFB-4C00-8A68-6829B783498B}"/>
               </a:ext>
             </a:extLst>
           </p:cNvPr>
@@ -2751,7 +2751,7 @@
           <p:cNvPr id="8" name="">
             <a:extLst xmlns:a="http://schemas.openxmlformats.org/drawingml/2006/main">
               <a:ext uri="{FF2B5EF4-FFF2-40B4-BE49-F238E27FC236}">
-                <a16:creationId xmlns:a16="http://schemas.microsoft.com/office/drawing/2014/main" id="{330E66CD-D687-4CAE-BD85-33247CBC59D6}"/>
+                <a16:creationId xmlns:a16="http://schemas.microsoft.com/office/drawing/2014/main" id="{B7A470BF-DE89-4B17-A800-D4D84715CD90}"/>
               </a:ext>
             </a:extLst>
           </p:cNvPr>
@@ -2808,7 +2808,7 @@
           <p:cNvPr id="9" name="">
             <a:extLst xmlns:a="http://schemas.openxmlformats.org/drawingml/2006/main">
               <a:ext uri="{FF2B5EF4-FFF2-40B4-BE49-F238E27FC236}">
-                <a16:creationId xmlns:a16="http://schemas.microsoft.com/office/drawing/2014/main" id="{6AE163DA-1567-46B5-9B24-320E5E228130}"/>
+                <a16:creationId xmlns:a16="http://schemas.microsoft.com/office/drawing/2014/main" id="{7073C2BD-4384-4B43-AA85-CA44CD0D7117}"/>
               </a:ext>
             </a:extLst>
           </p:cNvPr>
@@ -2865,7 +2865,7 @@
           <p:cNvPr id="10" name="">
             <a:extLst xmlns:a="http://schemas.openxmlformats.org/drawingml/2006/main">
               <a:ext uri="{FF2B5EF4-FFF2-40B4-BE49-F238E27FC236}">
-                <a16:creationId xmlns:a16="http://schemas.microsoft.com/office/drawing/2014/main" id="{7466B111-0EF2-44B9-B4EA-F176246F385B}"/>
+                <a16:creationId xmlns:a16="http://schemas.microsoft.com/office/drawing/2014/main" id="{EBA7452C-1E8E-423B-BDA2-994A8D6E65D5}"/>
               </a:ext>
             </a:extLst>
           </p:cNvPr>
@@ -2922,7 +2922,7 @@
           <p:cNvPr id="11" name="">
             <a:extLst xmlns:a="http://schemas.openxmlformats.org/drawingml/2006/main">
               <a:ext uri="{FF2B5EF4-FFF2-40B4-BE49-F238E27FC236}">
-                <a16:creationId xmlns:a16="http://schemas.microsoft.com/office/drawing/2014/main" id="{C238F8E5-EC9A-4447-AE3E-E35AA622ACE4}"/>
+                <a16:creationId xmlns:a16="http://schemas.microsoft.com/office/drawing/2014/main" id="{38B65D14-04CD-4B5A-B9E4-C6DD9F056BE0}"/>
               </a:ext>
             </a:extLst>
           </p:cNvPr>
@@ -2979,7 +2979,7 @@
           <p:cNvPr id="12" name="">
             <a:extLst xmlns:a="http://schemas.openxmlformats.org/drawingml/2006/main">
               <a:ext uri="{FF2B5EF4-FFF2-40B4-BE49-F238E27FC236}">
-                <a16:creationId xmlns:a16="http://schemas.microsoft.com/office/drawing/2014/main" id="{7B3815FD-AC40-44D6-80BE-968CDA5A7C45}"/>
+                <a16:creationId xmlns:a16="http://schemas.microsoft.com/office/drawing/2014/main" id="{D7270B52-0B5C-44D0-B925-2DB1897CA462}"/>
               </a:ext>
             </a:extLst>
           </p:cNvPr>
@@ -3036,7 +3036,7 @@
           <p:cNvPr id="13" name="">
             <a:extLst xmlns:a="http://schemas.openxmlformats.org/drawingml/2006/main">
               <a:ext uri="{FF2B5EF4-FFF2-40B4-BE49-F238E27FC236}">
-                <a16:creationId xmlns:a16="http://schemas.microsoft.com/office/drawing/2014/main" id="{451BC895-6421-4D85-8271-E48D5D627F2A}"/>
+                <a16:creationId xmlns:a16="http://schemas.microsoft.com/office/drawing/2014/main" id="{182582A4-077D-4656-9A82-63FB90DF83F9}"/>
               </a:ext>
             </a:extLst>
           </p:cNvPr>
@@ -3091,7 +3091,7 @@
     </p:spTree>
     <p:extLst>
       <p:ext uri="{BB962C8B-B14F-4D97-AF65-F5344CB8AC3E}">
-        <p14:creationId xmlns:p14="http://schemas.microsoft.com/office/powerpoint/2010/main" val="121825123"/>
+        <p14:creationId xmlns:p14="http://schemas.microsoft.com/office/powerpoint/2010/main" val="593204612"/>
       </p:ext>
     </p:extLst>
   </p:cSld>
@@ -3292,7 +3292,7 @@
           <p:cNvPr id="19" name="">
             <a:extLst xmlns:a="http://schemas.openxmlformats.org/drawingml/2006/main">
               <a:ext uri="{FF2B5EF4-FFF2-40B4-BE49-F238E27FC236}">
-                <a16:creationId xmlns:a16="http://schemas.microsoft.com/office/drawing/2014/main" id="{69F405E8-0528-4433-AC02-35BE0160B852}"/>
+                <a16:creationId xmlns:a16="http://schemas.microsoft.com/office/drawing/2014/main" id="{4A384F5A-52DB-4925-B532-A9D5933376F3}"/>
               </a:ext>
             </a:extLst>
           </p:cNvPr>
@@ -3324,7 +3324,7 @@
           <p:cNvPr id="2" name="">
             <a:extLst xmlns:a="http://schemas.openxmlformats.org/drawingml/2006/main">
               <a:ext uri="{FF2B5EF4-FFF2-40B4-BE49-F238E27FC236}">
-                <a16:creationId xmlns:a16="http://schemas.microsoft.com/office/drawing/2014/main" id="{39E15F88-D4CA-43D7-8A0C-CECFCC8AECD4}"/>
+                <a16:creationId xmlns:a16="http://schemas.microsoft.com/office/drawing/2014/main" id="{A3133DFE-5F1A-4304-9E57-A3D9A90FB9D1}"/>
               </a:ext>
             </a:extLst>
           </p:cNvPr>
@@ -3381,7 +3381,7 @@
           <p:cNvPr id="3" name="">
             <a:extLst xmlns:a="http://schemas.openxmlformats.org/drawingml/2006/main">
               <a:ext uri="{FF2B5EF4-FFF2-40B4-BE49-F238E27FC236}">
-                <a16:creationId xmlns:a16="http://schemas.microsoft.com/office/drawing/2014/main" id="{D51A3EA4-79C1-4686-AC6B-1FDD41BAD38F}"/>
+                <a16:creationId xmlns:a16="http://schemas.microsoft.com/office/drawing/2014/main" id="{8EE15C83-7C5A-4679-8D72-07E9F56CE278}"/>
               </a:ext>
             </a:extLst>
           </p:cNvPr>
@@ -3413,7 +3413,7 @@
           <p:cNvPr id="4" name="">
             <a:extLst xmlns:a="http://schemas.openxmlformats.org/drawingml/2006/main">
               <a:ext uri="{FF2B5EF4-FFF2-40B4-BE49-F238E27FC236}">
-                <a16:creationId xmlns:a16="http://schemas.microsoft.com/office/drawing/2014/main" id="{923AAC97-CE61-4797-9EC9-EFBF3AEFAEBA}"/>
+                <a16:creationId xmlns:a16="http://schemas.microsoft.com/office/drawing/2014/main" id="{22C2210D-41F6-4F02-A696-A65C0A5957B3}"/>
               </a:ext>
             </a:extLst>
           </p:cNvPr>
@@ -3470,7 +3470,7 @@
           <p:cNvPr id="5" name="">
             <a:extLst xmlns:a="http://schemas.openxmlformats.org/drawingml/2006/main">
               <a:ext uri="{FF2B5EF4-FFF2-40B4-BE49-F238E27FC236}">
-                <a16:creationId xmlns:a16="http://schemas.microsoft.com/office/drawing/2014/main" id="{D878C073-D561-472A-B954-808D2FC3AA91}"/>
+                <a16:creationId xmlns:a16="http://schemas.microsoft.com/office/drawing/2014/main" id="{0C9BDD94-8B50-4653-A8BC-F54AA4E7E3E1}"/>
               </a:ext>
             </a:extLst>
           </p:cNvPr>
@@ -3527,7 +3527,7 @@
           <p:cNvPr id="6" name="">
             <a:extLst xmlns:a="http://schemas.openxmlformats.org/drawingml/2006/main">
               <a:ext uri="{FF2B5EF4-FFF2-40B4-BE49-F238E27FC236}">
-                <a16:creationId xmlns:a16="http://schemas.microsoft.com/office/drawing/2014/main" id="{B7993981-91D8-40F3-A5E9-85D1CE84B779}"/>
+                <a16:creationId xmlns:a16="http://schemas.microsoft.com/office/drawing/2014/main" id="{6D08D8CE-DB23-47CC-88AC-EBA1A7D9F683}"/>
               </a:ext>
             </a:extLst>
           </p:cNvPr>
@@ -3584,7 +3584,7 @@
           <p:cNvPr id="7" name="">
             <a:extLst xmlns:a="http://schemas.openxmlformats.org/drawingml/2006/main">
               <a:ext uri="{FF2B5EF4-FFF2-40B4-BE49-F238E27FC236}">
-                <a16:creationId xmlns:a16="http://schemas.microsoft.com/office/drawing/2014/main" id="{EF71005B-9000-42E5-BE94-F0D02389B8A6}"/>
+                <a16:creationId xmlns:a16="http://schemas.microsoft.com/office/drawing/2014/main" id="{CA5C71AC-776E-49F8-AA6D-F0AA56EDAF4D}"/>
               </a:ext>
             </a:extLst>
           </p:cNvPr>
@@ -3616,7 +3616,7 @@
           <p:cNvPr id="8" name="">
             <a:extLst xmlns:a="http://schemas.openxmlformats.org/drawingml/2006/main">
               <a:ext uri="{FF2B5EF4-FFF2-40B4-BE49-F238E27FC236}">
-                <a16:creationId xmlns:a16="http://schemas.microsoft.com/office/drawing/2014/main" id="{AEEE0A0A-916E-4227-8320-F073EBF38BA3}"/>
+                <a16:creationId xmlns:a16="http://schemas.microsoft.com/office/drawing/2014/main" id="{9D328512-ABA9-4504-A48A-55B7A625B15A}"/>
               </a:ext>
             </a:extLst>
           </p:cNvPr>
@@ -3673,7 +3673,7 @@
           <p:cNvPr id="9" name="">
             <a:extLst xmlns:a="http://schemas.openxmlformats.org/drawingml/2006/main">
               <a:ext uri="{FF2B5EF4-FFF2-40B4-BE49-F238E27FC236}">
-                <a16:creationId xmlns:a16="http://schemas.microsoft.com/office/drawing/2014/main" id="{DD670055-6D33-43A7-A012-6DD74B1BA106}"/>
+                <a16:creationId xmlns:a16="http://schemas.microsoft.com/office/drawing/2014/main" id="{06278109-0A14-462C-89BD-D9C8BB510542}"/>
               </a:ext>
             </a:extLst>
           </p:cNvPr>
@@ -3730,7 +3730,7 @@
           <p:cNvPr id="10" name="">
             <a:extLst xmlns:a="http://schemas.openxmlformats.org/drawingml/2006/main">
               <a:ext uri="{FF2B5EF4-FFF2-40B4-BE49-F238E27FC236}">
-                <a16:creationId xmlns:a16="http://schemas.microsoft.com/office/drawing/2014/main" id="{D4D2321C-D61D-4A03-B349-2357062E5226}"/>
+                <a16:creationId xmlns:a16="http://schemas.microsoft.com/office/drawing/2014/main" id="{C27D681F-627E-4A12-8486-D1FF722887BB}"/>
               </a:ext>
             </a:extLst>
           </p:cNvPr>
@@ -3787,7 +3787,7 @@
           <p:cNvPr id="11" name="">
             <a:extLst xmlns:a="http://schemas.openxmlformats.org/drawingml/2006/main">
               <a:ext uri="{FF2B5EF4-FFF2-40B4-BE49-F238E27FC236}">
-                <a16:creationId xmlns:a16="http://schemas.microsoft.com/office/drawing/2014/main" id="{A48C6B5D-FB0C-430A-9EE6-4F63FA840479}"/>
+                <a16:creationId xmlns:a16="http://schemas.microsoft.com/office/drawing/2014/main" id="{82D0E7BE-06FE-4108-840A-963FCA332572}"/>
               </a:ext>
             </a:extLst>
           </p:cNvPr>
@@ -3821,7 +3821,7 @@
           <p:cNvPr id="12" name="">
             <a:extLst xmlns:a="http://schemas.openxmlformats.org/drawingml/2006/main">
               <a:ext uri="{FF2B5EF4-FFF2-40B4-BE49-F238E27FC236}">
-                <a16:creationId xmlns:a16="http://schemas.microsoft.com/office/drawing/2014/main" id="{3A784D00-07A1-4DE1-8DA0-D43675432C9F}"/>
+                <a16:creationId xmlns:a16="http://schemas.microsoft.com/office/drawing/2014/main" id="{BDC42DF2-70A6-49B9-96D1-5B76E185D047}"/>
               </a:ext>
             </a:extLst>
           </p:cNvPr>
@@ -3878,7 +3878,7 @@
           <p:cNvPr id="13" name="">
             <a:extLst xmlns:a="http://schemas.openxmlformats.org/drawingml/2006/main">
               <a:ext uri="{FF2B5EF4-FFF2-40B4-BE49-F238E27FC236}">
-                <a16:creationId xmlns:a16="http://schemas.microsoft.com/office/drawing/2014/main" id="{C79B7CF2-B7D2-4F61-8E7B-B74EDF9DEC7C}"/>
+                <a16:creationId xmlns:a16="http://schemas.microsoft.com/office/drawing/2014/main" id="{112B71EF-ECCD-4BD6-B645-C56BA3E42DE6}"/>
               </a:ext>
             </a:extLst>
           </p:cNvPr>
@@ -3935,7 +3935,7 @@
           <p:cNvPr id="14" name="">
             <a:extLst xmlns:a="http://schemas.openxmlformats.org/drawingml/2006/main">
               <a:ext uri="{FF2B5EF4-FFF2-40B4-BE49-F238E27FC236}">
-                <a16:creationId xmlns:a16="http://schemas.microsoft.com/office/drawing/2014/main" id="{3274188E-4BF6-4CB1-BF82-EDE45CF3BE83}"/>
+                <a16:creationId xmlns:a16="http://schemas.microsoft.com/office/drawing/2014/main" id="{0B96A085-B5B3-41E2-B7E3-656371FA2B30}"/>
               </a:ext>
             </a:extLst>
           </p:cNvPr>
@@ -3992,7 +3992,7 @@
           <p:cNvPr id="15" name="">
             <a:extLst xmlns:a="http://schemas.openxmlformats.org/drawingml/2006/main">
               <a:ext uri="{FF2B5EF4-FFF2-40B4-BE49-F238E27FC236}">
-                <a16:creationId xmlns:a16="http://schemas.microsoft.com/office/drawing/2014/main" id="{ED64CDA5-08EC-4BB3-98D2-47BECB311331}"/>
+                <a16:creationId xmlns:a16="http://schemas.microsoft.com/office/drawing/2014/main" id="{430B6F9F-50CC-4B7F-9752-043CB739BBFF}"/>
               </a:ext>
             </a:extLst>
           </p:cNvPr>
@@ -4026,7 +4026,7 @@
           <p:cNvPr id="16" name="">
             <a:extLst xmlns:a="http://schemas.openxmlformats.org/drawingml/2006/main">
               <a:ext uri="{FF2B5EF4-FFF2-40B4-BE49-F238E27FC236}">
-                <a16:creationId xmlns:a16="http://schemas.microsoft.com/office/drawing/2014/main" id="{FFE66387-D9DD-43EC-83D3-E96B94DB120D}"/>
+                <a16:creationId xmlns:a16="http://schemas.microsoft.com/office/drawing/2014/main" id="{DC10F6A9-7EAD-4CF9-8F9E-1A7EBD26953A}"/>
               </a:ext>
             </a:extLst>
           </p:cNvPr>
@@ -4083,7 +4083,7 @@
           <p:cNvPr id="17" name="">
             <a:extLst xmlns:a="http://schemas.openxmlformats.org/drawingml/2006/main">
               <a:ext uri="{FF2B5EF4-FFF2-40B4-BE49-F238E27FC236}">
-                <a16:creationId xmlns:a16="http://schemas.microsoft.com/office/drawing/2014/main" id="{50B28890-BDB0-48A5-B8A8-FF88CA2985E3}"/>
+                <a16:creationId xmlns:a16="http://schemas.microsoft.com/office/drawing/2014/main" id="{B2457D8C-2BC2-4298-B45A-724743ED5646}"/>
               </a:ext>
             </a:extLst>
           </p:cNvPr>
@@ -4140,7 +4140,7 @@
           <p:cNvPr id="18" name="">
             <a:extLst xmlns:a="http://schemas.openxmlformats.org/drawingml/2006/main">
               <a:ext uri="{FF2B5EF4-FFF2-40B4-BE49-F238E27FC236}">
-                <a16:creationId xmlns:a16="http://schemas.microsoft.com/office/drawing/2014/main" id="{B725C002-A7F0-4A9B-A516-DCE5D2FEEEB8}"/>
+                <a16:creationId xmlns:a16="http://schemas.microsoft.com/office/drawing/2014/main" id="{82962F95-1A18-449C-A900-BDC7355327D7}"/>
               </a:ext>
             </a:extLst>
           </p:cNvPr>
@@ -4195,7 +4195,7 @@
     </p:spTree>
     <p:extLst>
       <p:ext uri="{BB962C8B-B14F-4D97-AF65-F5344CB8AC3E}">
-        <p14:creationId xmlns:p14="http://schemas.microsoft.com/office/powerpoint/2010/main" val="1982742699"/>
+        <p14:creationId xmlns:p14="http://schemas.microsoft.com/office/powerpoint/2010/main" val="1824061250"/>
       </p:ext>
     </p:extLst>
   </p:cSld>
@@ -4350,7 +4350,7 @@
           <p:cNvPr id="23" name="">
             <a:extLst xmlns:a="http://schemas.openxmlformats.org/drawingml/2006/main">
               <a:ext uri="{FF2B5EF4-FFF2-40B4-BE49-F238E27FC236}">
-                <a16:creationId xmlns:a16="http://schemas.microsoft.com/office/drawing/2014/main" id="{7A5E6DE4-E505-4C98-A5EB-EEA95B815C7B}"/>
+                <a16:creationId xmlns:a16="http://schemas.microsoft.com/office/drawing/2014/main" id="{B03BDBE2-F6DC-4066-ADB2-192111F47794}"/>
               </a:ext>
             </a:extLst>
           </p:cNvPr>
@@ -4382,7 +4382,7 @@
           <p:cNvPr id="2" name="">
             <a:extLst xmlns:a="http://schemas.openxmlformats.org/drawingml/2006/main">
               <a:ext uri="{FF2B5EF4-FFF2-40B4-BE49-F238E27FC236}">
-                <a16:creationId xmlns:a16="http://schemas.microsoft.com/office/drawing/2014/main" id="{CDEDD239-DAE6-4D6F-8CC0-CFB647B769B3}"/>
+                <a16:creationId xmlns:a16="http://schemas.microsoft.com/office/drawing/2014/main" id="{B1BF0E66-F875-4458-A38B-65648589433B}"/>
               </a:ext>
             </a:extLst>
           </p:cNvPr>
@@ -4439,7 +4439,7 @@
           <p:cNvPr id="3" name="">
             <a:extLst xmlns:a="http://schemas.openxmlformats.org/drawingml/2006/main">
               <a:ext uri="{FF2B5EF4-FFF2-40B4-BE49-F238E27FC236}">
-                <a16:creationId xmlns:a16="http://schemas.microsoft.com/office/drawing/2014/main" id="{B32D0234-11BF-44F1-A1F3-4FFB36D49DBA}"/>
+                <a16:creationId xmlns:a16="http://schemas.microsoft.com/office/drawing/2014/main" id="{2A5F9FFA-4903-44A7-9F57-6729B6EF332A}"/>
               </a:ext>
             </a:extLst>
           </p:cNvPr>
@@ -4471,7 +4471,7 @@
           <p:cNvPr id="4" name="">
             <a:extLst xmlns:a="http://schemas.openxmlformats.org/drawingml/2006/main">
               <a:ext uri="{FF2B5EF4-FFF2-40B4-BE49-F238E27FC236}">
-                <a16:creationId xmlns:a16="http://schemas.microsoft.com/office/drawing/2014/main" id="{51A46E3A-49D7-4F74-8740-9BDE444FD3A7}"/>
+                <a16:creationId xmlns:a16="http://schemas.microsoft.com/office/drawing/2014/main" id="{775820DF-9DEB-4E65-A675-BD664F8AC151}"/>
               </a:ext>
             </a:extLst>
           </p:cNvPr>
@@ -4528,7 +4528,7 @@
           <p:cNvPr id="5" name="">
             <a:extLst xmlns:a="http://schemas.openxmlformats.org/drawingml/2006/main">
               <a:ext uri="{FF2B5EF4-FFF2-40B4-BE49-F238E27FC236}">
-                <a16:creationId xmlns:a16="http://schemas.microsoft.com/office/drawing/2014/main" id="{BF42855F-9A72-4E0C-8D00-8E7208302033}"/>
+                <a16:creationId xmlns:a16="http://schemas.microsoft.com/office/drawing/2014/main" id="{87411E28-3E50-46FD-9F79-9A6820251789}"/>
               </a:ext>
             </a:extLst>
           </p:cNvPr>
@@ -4585,7 +4585,7 @@
           <p:cNvPr id="6" name="">
             <a:extLst xmlns:a="http://schemas.openxmlformats.org/drawingml/2006/main">
               <a:ext uri="{FF2B5EF4-FFF2-40B4-BE49-F238E27FC236}">
-                <a16:creationId xmlns:a16="http://schemas.microsoft.com/office/drawing/2014/main" id="{4B75A372-DE09-4136-B1F6-40C69A87E197}"/>
+                <a16:creationId xmlns:a16="http://schemas.microsoft.com/office/drawing/2014/main" id="{8CB20ADB-4543-4E76-A047-B4A7E3087402}"/>
               </a:ext>
             </a:extLst>
           </p:cNvPr>
@@ -4642,7 +4642,7 @@
           <p:cNvPr id="7" name="">
             <a:extLst xmlns:a="http://schemas.openxmlformats.org/drawingml/2006/main">
               <a:ext uri="{FF2B5EF4-FFF2-40B4-BE49-F238E27FC236}">
-                <a16:creationId xmlns:a16="http://schemas.microsoft.com/office/drawing/2014/main" id="{8954CE2B-A385-4E25-89C9-DE4D94A690FB}"/>
+                <a16:creationId xmlns:a16="http://schemas.microsoft.com/office/drawing/2014/main" id="{81017570-7B56-4C9B-B7CA-2F68CAFC9720}"/>
               </a:ext>
             </a:extLst>
           </p:cNvPr>
@@ -4674,7 +4674,7 @@
           <p:cNvPr id="8" name="">
             <a:extLst xmlns:a="http://schemas.openxmlformats.org/drawingml/2006/main">
               <a:ext uri="{FF2B5EF4-FFF2-40B4-BE49-F238E27FC236}">
-                <a16:creationId xmlns:a16="http://schemas.microsoft.com/office/drawing/2014/main" id="{A8371DBA-988F-4156-88F2-EFA0D2664B1A}"/>
+                <a16:creationId xmlns:a16="http://schemas.microsoft.com/office/drawing/2014/main" id="{D39AA090-10C4-47C2-B067-814CE2751711}"/>
               </a:ext>
             </a:extLst>
           </p:cNvPr>
@@ -4731,7 +4731,7 @@
           <p:cNvPr id="9" name="">
             <a:extLst xmlns:a="http://schemas.openxmlformats.org/drawingml/2006/main">
               <a:ext uri="{FF2B5EF4-FFF2-40B4-BE49-F238E27FC236}">
-                <a16:creationId xmlns:a16="http://schemas.microsoft.com/office/drawing/2014/main" id="{E13D1C8F-0474-4009-BA9A-04B4A2D8CD74}"/>
+                <a16:creationId xmlns:a16="http://schemas.microsoft.com/office/drawing/2014/main" id="{F6217E57-825B-4BD0-A23E-CA9A1B7388D3}"/>
               </a:ext>
             </a:extLst>
           </p:cNvPr>
@@ -4788,7 +4788,7 @@
           <p:cNvPr id="10" name="">
             <a:extLst xmlns:a="http://schemas.openxmlformats.org/drawingml/2006/main">
               <a:ext uri="{FF2B5EF4-FFF2-40B4-BE49-F238E27FC236}">
-                <a16:creationId xmlns:a16="http://schemas.microsoft.com/office/drawing/2014/main" id="{B36600EF-8C16-44CD-BA27-27F7515CC401}"/>
+                <a16:creationId xmlns:a16="http://schemas.microsoft.com/office/drawing/2014/main" id="{59D9DAD9-FED1-4493-9CA6-034CE4854873}"/>
               </a:ext>
             </a:extLst>
           </p:cNvPr>
@@ -4822,7 +4822,7 @@
           <p:cNvPr id="11" name="">
             <a:extLst xmlns:a="http://schemas.openxmlformats.org/drawingml/2006/main">
               <a:ext uri="{FF2B5EF4-FFF2-40B4-BE49-F238E27FC236}">
-                <a16:creationId xmlns:a16="http://schemas.microsoft.com/office/drawing/2014/main" id="{7A64B204-9B15-4000-86A7-A1C83DAE3D63}"/>
+                <a16:creationId xmlns:a16="http://schemas.microsoft.com/office/drawing/2014/main" id="{196559BA-FC25-44FF-9708-E1E0D1017B38}"/>
               </a:ext>
             </a:extLst>
           </p:cNvPr>
@@ -4854,7 +4854,7 @@
           <p:cNvPr id="12" name="">
             <a:extLst xmlns:a="http://schemas.openxmlformats.org/drawingml/2006/main">
               <a:ext uri="{FF2B5EF4-FFF2-40B4-BE49-F238E27FC236}">
-                <a16:creationId xmlns:a16="http://schemas.microsoft.com/office/drawing/2014/main" id="{E28143C2-C690-48FD-8E6C-BECAF2F95562}"/>
+                <a16:creationId xmlns:a16="http://schemas.microsoft.com/office/drawing/2014/main" id="{8E9B4895-539B-45A2-828A-285231E0BFC1}"/>
               </a:ext>
             </a:extLst>
           </p:cNvPr>
@@ -4911,7 +4911,7 @@
           <p:cNvPr id="13" name="">
             <a:extLst xmlns:a="http://schemas.openxmlformats.org/drawingml/2006/main">
               <a:ext uri="{FF2B5EF4-FFF2-40B4-BE49-F238E27FC236}">
-                <a16:creationId xmlns:a16="http://schemas.microsoft.com/office/drawing/2014/main" id="{57FC0E72-DBC3-4F10-A2C1-1B4D9CB37379}"/>
+                <a16:creationId xmlns:a16="http://schemas.microsoft.com/office/drawing/2014/main" id="{ADB0BE86-7F48-43D1-89BF-C83439E781DD}"/>
               </a:ext>
             </a:extLst>
           </p:cNvPr>
@@ -4968,7 +4968,7 @@
           <p:cNvPr id="14" name="">
             <a:extLst xmlns:a="http://schemas.openxmlformats.org/drawingml/2006/main">
               <a:ext uri="{FF2B5EF4-FFF2-40B4-BE49-F238E27FC236}">
-                <a16:creationId xmlns:a16="http://schemas.microsoft.com/office/drawing/2014/main" id="{7E1FF6D1-D312-4C0A-9AC6-4C35F3798B22}"/>
+                <a16:creationId xmlns:a16="http://schemas.microsoft.com/office/drawing/2014/main" id="{FB51D971-176C-4BBD-9629-E0222000E19D}"/>
               </a:ext>
             </a:extLst>
           </p:cNvPr>
@@ -5002,7 +5002,7 @@
           <p:cNvPr id="15" name="">
             <a:extLst xmlns:a="http://schemas.openxmlformats.org/drawingml/2006/main">
               <a:ext uri="{FF2B5EF4-FFF2-40B4-BE49-F238E27FC236}">
-                <a16:creationId xmlns:a16="http://schemas.microsoft.com/office/drawing/2014/main" id="{8EF6DD96-2EBD-493A-94FC-3B3DC8FFFB41}"/>
+                <a16:creationId xmlns:a16="http://schemas.microsoft.com/office/drawing/2014/main" id="{6BCDF3C8-D637-4BFF-8C60-DCCCB62590BD}"/>
               </a:ext>
             </a:extLst>
           </p:cNvPr>
@@ -5034,7 +5034,7 @@
           <p:cNvPr id="16" name="">
             <a:extLst xmlns:a="http://schemas.openxmlformats.org/drawingml/2006/main">
               <a:ext uri="{FF2B5EF4-FFF2-40B4-BE49-F238E27FC236}">
-                <a16:creationId xmlns:a16="http://schemas.microsoft.com/office/drawing/2014/main" id="{95172F1F-8801-45E8-ACB2-885029C4F45E}"/>
+                <a16:creationId xmlns:a16="http://schemas.microsoft.com/office/drawing/2014/main" id="{F55CFA3C-FD1B-4046-AB04-9ABFDC642ED1}"/>
               </a:ext>
             </a:extLst>
           </p:cNvPr>
@@ -5091,7 +5091,7 @@
           <p:cNvPr id="17" name="">
             <a:extLst xmlns:a="http://schemas.openxmlformats.org/drawingml/2006/main">
               <a:ext uri="{FF2B5EF4-FFF2-40B4-BE49-F238E27FC236}">
-                <a16:creationId xmlns:a16="http://schemas.microsoft.com/office/drawing/2014/main" id="{F0713951-312C-40E9-81F0-38F31F64D399}"/>
+                <a16:creationId xmlns:a16="http://schemas.microsoft.com/office/drawing/2014/main" id="{4EFAB6C5-3A90-4483-9EF2-8AF1DE0DE625}"/>
               </a:ext>
             </a:extLst>
           </p:cNvPr>
@@ -5148,7 +5148,7 @@
           <p:cNvPr id="18" name="">
             <a:extLst xmlns:a="http://schemas.openxmlformats.org/drawingml/2006/main">
               <a:ext uri="{FF2B5EF4-FFF2-40B4-BE49-F238E27FC236}">
-                <a16:creationId xmlns:a16="http://schemas.microsoft.com/office/drawing/2014/main" id="{A7B3A0DE-9D3F-4CC2-B2D8-783449C1C07C}"/>
+                <a16:creationId xmlns:a16="http://schemas.microsoft.com/office/drawing/2014/main" id="{A9799C2D-E5A7-4C77-A09C-B4501ABE0E27}"/>
               </a:ext>
             </a:extLst>
           </p:cNvPr>
@@ -5182,7 +5182,7 @@
           <p:cNvPr id="19" name="">
             <a:extLst xmlns:a="http://schemas.openxmlformats.org/drawingml/2006/main">
               <a:ext uri="{FF2B5EF4-FFF2-40B4-BE49-F238E27FC236}">
-                <a16:creationId xmlns:a16="http://schemas.microsoft.com/office/drawing/2014/main" id="{484570F1-26C9-4230-8F7B-0A01859AAC63}"/>
+                <a16:creationId xmlns:a16="http://schemas.microsoft.com/office/drawing/2014/main" id="{96288B7B-2731-4D37-88D5-A107DB5DBAB5}"/>
               </a:ext>
             </a:extLst>
           </p:cNvPr>
@@ -5214,7 +5214,7 @@
           <p:cNvPr id="20" name="">
             <a:extLst xmlns:a="http://schemas.openxmlformats.org/drawingml/2006/main">
               <a:ext uri="{FF2B5EF4-FFF2-40B4-BE49-F238E27FC236}">
-                <a16:creationId xmlns:a16="http://schemas.microsoft.com/office/drawing/2014/main" id="{12277BC4-7E8E-4198-A7EF-7D9ACEE140AC}"/>
+                <a16:creationId xmlns:a16="http://schemas.microsoft.com/office/drawing/2014/main" id="{6CB8D97E-D555-4081-892F-D58CC91AD6A7}"/>
               </a:ext>
             </a:extLst>
           </p:cNvPr>
@@ -5271,7 +5271,7 @@
           <p:cNvPr id="21" name="">
             <a:extLst xmlns:a="http://schemas.openxmlformats.org/drawingml/2006/main">
               <a:ext uri="{FF2B5EF4-FFF2-40B4-BE49-F238E27FC236}">
-                <a16:creationId xmlns:a16="http://schemas.microsoft.com/office/drawing/2014/main" id="{0D47CCCF-02BF-429C-9875-E6B24DCB5AFB}"/>
+                <a16:creationId xmlns:a16="http://schemas.microsoft.com/office/drawing/2014/main" id="{C8D7D626-7DDD-4E4F-874A-1328B256312F}"/>
               </a:ext>
             </a:extLst>
           </p:cNvPr>
@@ -5328,7 +5328,7 @@
           <p:cNvPr id="22" name="">
             <a:extLst xmlns:a="http://schemas.openxmlformats.org/drawingml/2006/main">
               <a:ext uri="{FF2B5EF4-FFF2-40B4-BE49-F238E27FC236}">
-                <a16:creationId xmlns:a16="http://schemas.microsoft.com/office/drawing/2014/main" id="{30210BBF-75C8-4710-ADBD-84C01EAB6572}"/>
+                <a16:creationId xmlns:a16="http://schemas.microsoft.com/office/drawing/2014/main" id="{B5A3A23C-75DB-42D9-8533-711EE33D0D28}"/>
               </a:ext>
             </a:extLst>
           </p:cNvPr>
@@ -5383,7 +5383,7 @@
     </p:spTree>
     <p:extLst>
       <p:ext uri="{BB962C8B-B14F-4D97-AF65-F5344CB8AC3E}">
-        <p14:creationId xmlns:p14="http://schemas.microsoft.com/office/powerpoint/2010/main" val="495065049"/>
+        <p14:creationId xmlns:p14="http://schemas.microsoft.com/office/powerpoint/2010/main" val="1148186646"/>
       </p:ext>
     </p:extLst>
   </p:cSld>
@@ -5584,7 +5584,7 @@
           <p:cNvPr id="23" name="">
             <a:extLst xmlns:a="http://schemas.openxmlformats.org/drawingml/2006/main">
               <a:ext uri="{FF2B5EF4-FFF2-40B4-BE49-F238E27FC236}">
-                <a16:creationId xmlns:a16="http://schemas.microsoft.com/office/drawing/2014/main" id="{68EA8098-1FA9-488D-B26C-0F89381DCECD}"/>
+                <a16:creationId xmlns:a16="http://schemas.microsoft.com/office/drawing/2014/main" id="{F2B8B743-663F-4371-89CB-BBE3640450FA}"/>
               </a:ext>
             </a:extLst>
           </p:cNvPr>
@@ -5616,7 +5616,7 @@
           <p:cNvPr id="2" name="">
             <a:extLst xmlns:a="http://schemas.openxmlformats.org/drawingml/2006/main">
               <a:ext uri="{FF2B5EF4-FFF2-40B4-BE49-F238E27FC236}">
-                <a16:creationId xmlns:a16="http://schemas.microsoft.com/office/drawing/2014/main" id="{C55FE675-57A8-49F3-9493-0BF420B7E7BD}"/>
+                <a16:creationId xmlns:a16="http://schemas.microsoft.com/office/drawing/2014/main" id="{EC6D545E-7FA7-4C86-BBDC-5C47FE4B1461}"/>
               </a:ext>
             </a:extLst>
           </p:cNvPr>
@@ -5673,7 +5673,7 @@
           <p:cNvPr id="3" name="">
             <a:extLst xmlns:a="http://schemas.openxmlformats.org/drawingml/2006/main">
               <a:ext uri="{FF2B5EF4-FFF2-40B4-BE49-F238E27FC236}">
-                <a16:creationId xmlns:a16="http://schemas.microsoft.com/office/drawing/2014/main" id="{F3FA0F98-D58A-4C7C-A3AA-BC785A8DFEF0}"/>
+                <a16:creationId xmlns:a16="http://schemas.microsoft.com/office/drawing/2014/main" id="{0977A43F-0BAF-4D53-98E6-E2D2A34E6B96}"/>
               </a:ext>
             </a:extLst>
           </p:cNvPr>
@@ -5705,7 +5705,7 @@
           <p:cNvPr id="4" name="">
             <a:extLst xmlns:a="http://schemas.openxmlformats.org/drawingml/2006/main">
               <a:ext uri="{FF2B5EF4-FFF2-40B4-BE49-F238E27FC236}">
-                <a16:creationId xmlns:a16="http://schemas.microsoft.com/office/drawing/2014/main" id="{1A25CA47-7B5C-4893-A84A-5305198F4ED3}"/>
+                <a16:creationId xmlns:a16="http://schemas.microsoft.com/office/drawing/2014/main" id="{0F1AD94E-057E-4762-A5E8-E46F55E47821}"/>
               </a:ext>
             </a:extLst>
           </p:cNvPr>
@@ -5762,7 +5762,7 @@
           <p:cNvPr id="5" name="">
             <a:extLst xmlns:a="http://schemas.openxmlformats.org/drawingml/2006/main">
               <a:ext uri="{FF2B5EF4-FFF2-40B4-BE49-F238E27FC236}">
-                <a16:creationId xmlns:a16="http://schemas.microsoft.com/office/drawing/2014/main" id="{1628A17B-2CBC-4566-B239-6AB980DFB488}"/>
+                <a16:creationId xmlns:a16="http://schemas.microsoft.com/office/drawing/2014/main" id="{17EAB7B8-9D79-4F4A-852F-205E89483D6F}"/>
               </a:ext>
             </a:extLst>
           </p:cNvPr>
@@ -5819,7 +5819,7 @@
           <p:cNvPr id="6" name="">
             <a:extLst xmlns:a="http://schemas.openxmlformats.org/drawingml/2006/main">
               <a:ext uri="{FF2B5EF4-FFF2-40B4-BE49-F238E27FC236}">
-                <a16:creationId xmlns:a16="http://schemas.microsoft.com/office/drawing/2014/main" id="{52EDE8FF-25E0-4D68-89E6-3ACF79B5CEC5}"/>
+                <a16:creationId xmlns:a16="http://schemas.microsoft.com/office/drawing/2014/main" id="{BED40588-7411-4F65-92C9-05AB40A71F2B}"/>
               </a:ext>
             </a:extLst>
           </p:cNvPr>
@@ -5876,7 +5876,7 @@
           <p:cNvPr id="7" name="">
             <a:extLst xmlns:a="http://schemas.openxmlformats.org/drawingml/2006/main">
               <a:ext uri="{FF2B5EF4-FFF2-40B4-BE49-F238E27FC236}">
-                <a16:creationId xmlns:a16="http://schemas.microsoft.com/office/drawing/2014/main" id="{DE310B0C-85D9-44FD-A069-C5687E8A0ECC}"/>
+                <a16:creationId xmlns:a16="http://schemas.microsoft.com/office/drawing/2014/main" id="{CE8EC532-182C-486E-BD7F-3D6F9881A334}"/>
               </a:ext>
             </a:extLst>
           </p:cNvPr>
@@ -5908,7 +5908,7 @@
           <p:cNvPr id="8" name="">
             <a:extLst xmlns:a="http://schemas.openxmlformats.org/drawingml/2006/main">
               <a:ext uri="{FF2B5EF4-FFF2-40B4-BE49-F238E27FC236}">
-                <a16:creationId xmlns:a16="http://schemas.microsoft.com/office/drawing/2014/main" id="{FF560941-1627-4B7B-8E80-D56483114847}"/>
+                <a16:creationId xmlns:a16="http://schemas.microsoft.com/office/drawing/2014/main" id="{3718F0F6-546B-411D-9305-38EA3B05AF89}"/>
               </a:ext>
             </a:extLst>
           </p:cNvPr>
@@ -5965,7 +5965,7 @@
           <p:cNvPr id="9" name="">
             <a:extLst xmlns:a="http://schemas.openxmlformats.org/drawingml/2006/main">
               <a:ext uri="{FF2B5EF4-FFF2-40B4-BE49-F238E27FC236}">
-                <a16:creationId xmlns:a16="http://schemas.microsoft.com/office/drawing/2014/main" id="{BD6C8679-E411-4501-801D-13C2CF647392}"/>
+                <a16:creationId xmlns:a16="http://schemas.microsoft.com/office/drawing/2014/main" id="{6AFD323A-C07C-4461-B853-802198E9C3DD}"/>
               </a:ext>
             </a:extLst>
           </p:cNvPr>
@@ -6022,7 +6022,7 @@
           <p:cNvPr id="10" name="">
             <a:extLst xmlns:a="http://schemas.openxmlformats.org/drawingml/2006/main">
               <a:ext uri="{FF2B5EF4-FFF2-40B4-BE49-F238E27FC236}">
-                <a16:creationId xmlns:a16="http://schemas.microsoft.com/office/drawing/2014/main" id="{C9A2F8CE-70DF-46C0-82CF-EBC3B4687589}"/>
+                <a16:creationId xmlns:a16="http://schemas.microsoft.com/office/drawing/2014/main" id="{48612C5F-4BA2-4114-B26D-4C8E95F79F35}"/>
               </a:ext>
             </a:extLst>
           </p:cNvPr>
@@ -6056,7 +6056,7 @@
           <p:cNvPr id="11" name="">
             <a:extLst xmlns:a="http://schemas.openxmlformats.org/drawingml/2006/main">
               <a:ext uri="{FF2B5EF4-FFF2-40B4-BE49-F238E27FC236}">
-                <a16:creationId xmlns:a16="http://schemas.microsoft.com/office/drawing/2014/main" id="{47FF81AA-27A7-454A-B196-A3521E2C60DE}"/>
+                <a16:creationId xmlns:a16="http://schemas.microsoft.com/office/drawing/2014/main" id="{BDF5339D-CF1D-4741-8C16-25272CF59C86}"/>
               </a:ext>
             </a:extLst>
           </p:cNvPr>
@@ -6088,7 +6088,7 @@
           <p:cNvPr id="12" name="">
             <a:extLst xmlns:a="http://schemas.openxmlformats.org/drawingml/2006/main">
               <a:ext uri="{FF2B5EF4-FFF2-40B4-BE49-F238E27FC236}">
-                <a16:creationId xmlns:a16="http://schemas.microsoft.com/office/drawing/2014/main" id="{BD0DDE30-109F-4512-AAEF-66F4FC40EE63}"/>
+                <a16:creationId xmlns:a16="http://schemas.microsoft.com/office/drawing/2014/main" id="{E440ACFA-70B3-4FD6-9483-890247286584}"/>
               </a:ext>
             </a:extLst>
           </p:cNvPr>
@@ -6145,7 +6145,7 @@
           <p:cNvPr id="13" name="">
             <a:extLst xmlns:a="http://schemas.openxmlformats.org/drawingml/2006/main">
               <a:ext uri="{FF2B5EF4-FFF2-40B4-BE49-F238E27FC236}">
-                <a16:creationId xmlns:a16="http://schemas.microsoft.com/office/drawing/2014/main" id="{70B4FBD4-1571-4551-A9F1-923ADC39FE7F}"/>
+                <a16:creationId xmlns:a16="http://schemas.microsoft.com/office/drawing/2014/main" id="{0E3543BD-7CE8-4F12-A657-F89383A30BB3}"/>
               </a:ext>
             </a:extLst>
           </p:cNvPr>
@@ -6202,7 +6202,7 @@
           <p:cNvPr id="14" name="">
             <a:extLst xmlns:a="http://schemas.openxmlformats.org/drawingml/2006/main">
               <a:ext uri="{FF2B5EF4-FFF2-40B4-BE49-F238E27FC236}">
-                <a16:creationId xmlns:a16="http://schemas.microsoft.com/office/drawing/2014/main" id="{2FC07A84-F94A-441A-85D4-6E506C79F320}"/>
+                <a16:creationId xmlns:a16="http://schemas.microsoft.com/office/drawing/2014/main" id="{D23B19B5-2AD2-4455-B959-185CF72CC2B2}"/>
               </a:ext>
             </a:extLst>
           </p:cNvPr>
@@ -6236,7 +6236,7 @@
           <p:cNvPr id="15" name="">
             <a:extLst xmlns:a="http://schemas.openxmlformats.org/drawingml/2006/main">
               <a:ext uri="{FF2B5EF4-FFF2-40B4-BE49-F238E27FC236}">
-                <a16:creationId xmlns:a16="http://schemas.microsoft.com/office/drawing/2014/main" id="{900DD9C9-CB17-4CBC-AAB0-8599BAA13227}"/>
+                <a16:creationId xmlns:a16="http://schemas.microsoft.com/office/drawing/2014/main" id="{4BA2BE10-6BDD-4E8F-A9C5-B3A652AB2309}"/>
               </a:ext>
             </a:extLst>
           </p:cNvPr>
@@ -6268,7 +6268,7 @@
           <p:cNvPr id="16" name="">
             <a:extLst xmlns:a="http://schemas.openxmlformats.org/drawingml/2006/main">
               <a:ext uri="{FF2B5EF4-FFF2-40B4-BE49-F238E27FC236}">
-                <a16:creationId xmlns:a16="http://schemas.microsoft.com/office/drawing/2014/main" id="{8F41CB61-B264-436F-8540-05A5284B6D2B}"/>
+                <a16:creationId xmlns:a16="http://schemas.microsoft.com/office/drawing/2014/main" id="{711EE6B6-BFBB-4275-9831-4626502BAC75}"/>
               </a:ext>
             </a:extLst>
           </p:cNvPr>
@@ -6325,7 +6325,7 @@
           <p:cNvPr id="17" name="">
             <a:extLst xmlns:a="http://schemas.openxmlformats.org/drawingml/2006/main">
               <a:ext uri="{FF2B5EF4-FFF2-40B4-BE49-F238E27FC236}">
-                <a16:creationId xmlns:a16="http://schemas.microsoft.com/office/drawing/2014/main" id="{509B6AF9-C647-433C-8776-D6A70509F980}"/>
+                <a16:creationId xmlns:a16="http://schemas.microsoft.com/office/drawing/2014/main" id="{0BB6CB67-D74D-4750-B85E-EAE250920BB1}"/>
               </a:ext>
             </a:extLst>
           </p:cNvPr>
@@ -6382,7 +6382,7 @@
           <p:cNvPr id="18" name="">
             <a:extLst xmlns:a="http://schemas.openxmlformats.org/drawingml/2006/main">
               <a:ext uri="{FF2B5EF4-FFF2-40B4-BE49-F238E27FC236}">
-                <a16:creationId xmlns:a16="http://schemas.microsoft.com/office/drawing/2014/main" id="{983C3D28-A668-402C-8377-52ABBCA6D0E9}"/>
+                <a16:creationId xmlns:a16="http://schemas.microsoft.com/office/drawing/2014/main" id="{5424EBA5-8D04-4188-855D-D96C013F7B0B}"/>
               </a:ext>
             </a:extLst>
           </p:cNvPr>
@@ -6416,7 +6416,7 @@
           <p:cNvPr id="19" name="">
             <a:extLst xmlns:a="http://schemas.openxmlformats.org/drawingml/2006/main">
               <a:ext uri="{FF2B5EF4-FFF2-40B4-BE49-F238E27FC236}">
-                <a16:creationId xmlns:a16="http://schemas.microsoft.com/office/drawing/2014/main" id="{F40CF9E9-BE2A-4BF4-A943-536FA5E961A3}"/>
+                <a16:creationId xmlns:a16="http://schemas.microsoft.com/office/drawing/2014/main" id="{618927CB-4715-4706-86E6-5ABF024857BB}"/>
               </a:ext>
             </a:extLst>
           </p:cNvPr>
@@ -6448,7 +6448,7 @@
           <p:cNvPr id="20" name="">
             <a:extLst xmlns:a="http://schemas.openxmlformats.org/drawingml/2006/main">
               <a:ext uri="{FF2B5EF4-FFF2-40B4-BE49-F238E27FC236}">
-                <a16:creationId xmlns:a16="http://schemas.microsoft.com/office/drawing/2014/main" id="{4B89CBA4-0EDF-420B-A234-942020BE760B}"/>
+                <a16:creationId xmlns:a16="http://schemas.microsoft.com/office/drawing/2014/main" id="{AF9C6E27-2E9E-4AEC-AAEB-68333EF16FEE}"/>
               </a:ext>
             </a:extLst>
           </p:cNvPr>
@@ -6505,7 +6505,7 @@
           <p:cNvPr id="21" name="">
             <a:extLst xmlns:a="http://schemas.openxmlformats.org/drawingml/2006/main">
               <a:ext uri="{FF2B5EF4-FFF2-40B4-BE49-F238E27FC236}">
-                <a16:creationId xmlns:a16="http://schemas.microsoft.com/office/drawing/2014/main" id="{13A50780-75C0-4D98-BCEB-89E3E398A80B}"/>
+                <a16:creationId xmlns:a16="http://schemas.microsoft.com/office/drawing/2014/main" id="{1DCDBDD3-ACC9-4D05-8C37-504CCD064379}"/>
               </a:ext>
             </a:extLst>
           </p:cNvPr>
@@ -6562,7 +6562,7 @@
           <p:cNvPr id="22" name="">
             <a:extLst xmlns:a="http://schemas.openxmlformats.org/drawingml/2006/main">
               <a:ext uri="{FF2B5EF4-FFF2-40B4-BE49-F238E27FC236}">
-                <a16:creationId xmlns:a16="http://schemas.microsoft.com/office/drawing/2014/main" id="{E9C83CA3-23C1-4433-A0D9-C5BA78A58D69}"/>
+                <a16:creationId xmlns:a16="http://schemas.microsoft.com/office/drawing/2014/main" id="{2A02E5AA-DF45-4372-A953-1908D8C23BB3}"/>
               </a:ext>
             </a:extLst>
           </p:cNvPr>
@@ -6617,7 +6617,7 @@
     </p:spTree>
     <p:extLst>
       <p:ext uri="{BB962C8B-B14F-4D97-AF65-F5344CB8AC3E}">
-        <p14:creationId xmlns:p14="http://schemas.microsoft.com/office/powerpoint/2010/main" val="1618622875"/>
+        <p14:creationId xmlns:p14="http://schemas.microsoft.com/office/powerpoint/2010/main" val="1709032627"/>
       </p:ext>
     </p:extLst>
   </p:cSld>
@@ -6818,7 +6818,7 @@
           <p:cNvPr id="16" name="">
             <a:extLst xmlns:a="http://schemas.openxmlformats.org/drawingml/2006/main">
               <a:ext uri="{FF2B5EF4-FFF2-40B4-BE49-F238E27FC236}">
-                <a16:creationId xmlns:a16="http://schemas.microsoft.com/office/drawing/2014/main" id="{30B66EC5-C6EA-46DE-8DF7-4A4FB8F088BC}"/>
+                <a16:creationId xmlns:a16="http://schemas.microsoft.com/office/drawing/2014/main" id="{F02224BC-BFF2-41C8-A432-296A05E72F6F}"/>
               </a:ext>
             </a:extLst>
           </p:cNvPr>
@@ -6850,7 +6850,7 @@
           <p:cNvPr id="2" name="">
             <a:extLst xmlns:a="http://schemas.openxmlformats.org/drawingml/2006/main">
               <a:ext uri="{FF2B5EF4-FFF2-40B4-BE49-F238E27FC236}">
-                <a16:creationId xmlns:a16="http://schemas.microsoft.com/office/drawing/2014/main" id="{FAA10B46-6304-4818-8BFC-2006515A5EA6}"/>
+                <a16:creationId xmlns:a16="http://schemas.microsoft.com/office/drawing/2014/main" id="{82019AD9-A26F-44E7-8190-A8F0C977C5B0}"/>
               </a:ext>
             </a:extLst>
           </p:cNvPr>
@@ -6907,7 +6907,7 @@
           <p:cNvPr id="3" name="">
             <a:extLst xmlns:a="http://schemas.openxmlformats.org/drawingml/2006/main">
               <a:ext uri="{FF2B5EF4-FFF2-40B4-BE49-F238E27FC236}">
-                <a16:creationId xmlns:a16="http://schemas.microsoft.com/office/drawing/2014/main" id="{0637C2FB-5B42-48DC-8ABA-54219F2F7354}"/>
+                <a16:creationId xmlns:a16="http://schemas.microsoft.com/office/drawing/2014/main" id="{5EC588BA-4F48-4F12-B4FA-0EF7A6FC7797}"/>
               </a:ext>
             </a:extLst>
           </p:cNvPr>
@@ -6939,7 +6939,7 @@
           <p:cNvPr id="4" name="">
             <a:extLst xmlns:a="http://schemas.openxmlformats.org/drawingml/2006/main">
               <a:ext uri="{FF2B5EF4-FFF2-40B4-BE49-F238E27FC236}">
-                <a16:creationId xmlns:a16="http://schemas.microsoft.com/office/drawing/2014/main" id="{200724B2-FD40-4854-AE23-D60EA280C944}"/>
+                <a16:creationId xmlns:a16="http://schemas.microsoft.com/office/drawing/2014/main" id="{6CC6AD78-33E4-47DD-8594-3A0E9B4144F7}"/>
               </a:ext>
             </a:extLst>
           </p:cNvPr>
@@ -6996,7 +6996,7 @@
           <p:cNvPr id="5" name="">
             <a:extLst xmlns:a="http://schemas.openxmlformats.org/drawingml/2006/main">
               <a:ext uri="{FF2B5EF4-FFF2-40B4-BE49-F238E27FC236}">
-                <a16:creationId xmlns:a16="http://schemas.microsoft.com/office/drawing/2014/main" id="{F16B81A4-39C0-41C5-9A85-94BF474DD5FE}"/>
+                <a16:creationId xmlns:a16="http://schemas.microsoft.com/office/drawing/2014/main" id="{4658A1BF-0DE7-495D-9BC9-91BFADCA8776}"/>
               </a:ext>
             </a:extLst>
           </p:cNvPr>
@@ -7053,7 +7053,7 @@
           <p:cNvPr id="6" name="">
             <a:extLst xmlns:a="http://schemas.openxmlformats.org/drawingml/2006/main">
               <a:ext uri="{FF2B5EF4-FFF2-40B4-BE49-F238E27FC236}">
-                <a16:creationId xmlns:a16="http://schemas.microsoft.com/office/drawing/2014/main" id="{7B4B013B-A520-4B0D-8C85-B3D43CEF38BC}"/>
+                <a16:creationId xmlns:a16="http://schemas.microsoft.com/office/drawing/2014/main" id="{8FB4F286-8F81-43CF-8D60-E151E66ACEA5}"/>
               </a:ext>
             </a:extLst>
           </p:cNvPr>
@@ -7110,7 +7110,7 @@
           <p:cNvPr id="7" name="">
             <a:extLst xmlns:a="http://schemas.openxmlformats.org/drawingml/2006/main">
               <a:ext uri="{FF2B5EF4-FFF2-40B4-BE49-F238E27FC236}">
-                <a16:creationId xmlns:a16="http://schemas.microsoft.com/office/drawing/2014/main" id="{21D14D6D-EC03-4AEF-9C3F-7425DA54096F}"/>
+                <a16:creationId xmlns:a16="http://schemas.microsoft.com/office/drawing/2014/main" id="{636A1114-F19F-485A-A71B-882031DBE02F}"/>
               </a:ext>
             </a:extLst>
           </p:cNvPr>
@@ -7142,7 +7142,7 @@
           <p:cNvPr id="8" name="">
             <a:extLst xmlns:a="http://schemas.openxmlformats.org/drawingml/2006/main">
               <a:ext uri="{FF2B5EF4-FFF2-40B4-BE49-F238E27FC236}">
-                <a16:creationId xmlns:a16="http://schemas.microsoft.com/office/drawing/2014/main" id="{146D7080-AF9F-4F92-9335-4CC478B0C483}"/>
+                <a16:creationId xmlns:a16="http://schemas.microsoft.com/office/drawing/2014/main" id="{9F8B95F2-A401-4097-B536-6176A3216BFB}"/>
               </a:ext>
             </a:extLst>
           </p:cNvPr>
@@ -7199,7 +7199,7 @@
           <p:cNvPr id="9" name="">
             <a:extLst xmlns:a="http://schemas.openxmlformats.org/drawingml/2006/main">
               <a:ext uri="{FF2B5EF4-FFF2-40B4-BE49-F238E27FC236}">
-                <a16:creationId xmlns:a16="http://schemas.microsoft.com/office/drawing/2014/main" id="{81588379-1B53-4AE8-A9C2-865A56723255}"/>
+                <a16:creationId xmlns:a16="http://schemas.microsoft.com/office/drawing/2014/main" id="{BEA74E41-A1BD-4852-AB3F-894F21C8DC4F}"/>
               </a:ext>
             </a:extLst>
           </p:cNvPr>
@@ -7256,7 +7256,7 @@
           <p:cNvPr id="10" name="">
             <a:extLst xmlns:a="http://schemas.openxmlformats.org/drawingml/2006/main">
               <a:ext uri="{FF2B5EF4-FFF2-40B4-BE49-F238E27FC236}">
-                <a16:creationId xmlns:a16="http://schemas.microsoft.com/office/drawing/2014/main" id="{52F33A15-9FCC-4129-ACB7-6B4EF1F498D9}"/>
+                <a16:creationId xmlns:a16="http://schemas.microsoft.com/office/drawing/2014/main" id="{BB5F320E-0B88-43C0-A08C-9EF2ABD0A43D}"/>
               </a:ext>
             </a:extLst>
           </p:cNvPr>
@@ -7313,7 +7313,7 @@
           <p:cNvPr id="11" name="">
             <a:extLst xmlns:a="http://schemas.openxmlformats.org/drawingml/2006/main">
               <a:ext uri="{FF2B5EF4-FFF2-40B4-BE49-F238E27FC236}">
-                <a16:creationId xmlns:a16="http://schemas.microsoft.com/office/drawing/2014/main" id="{D0732A5E-77B7-442D-A631-4A3A2C600A98}"/>
+                <a16:creationId xmlns:a16="http://schemas.microsoft.com/office/drawing/2014/main" id="{D9DBAA86-2CEA-496C-B2B9-2C966CC62287}"/>
               </a:ext>
             </a:extLst>
           </p:cNvPr>
@@ -7345,7 +7345,7 @@
           <p:cNvPr id="12" name="">
             <a:extLst xmlns:a="http://schemas.openxmlformats.org/drawingml/2006/main">
               <a:ext uri="{FF2B5EF4-FFF2-40B4-BE49-F238E27FC236}">
-                <a16:creationId xmlns:a16="http://schemas.microsoft.com/office/drawing/2014/main" id="{D72F60BA-1FBB-4AB0-85A9-88E1A5310462}"/>
+                <a16:creationId xmlns:a16="http://schemas.microsoft.com/office/drawing/2014/main" id="{10CEDA7C-81ED-48D0-BBC0-27D7C573E923}"/>
               </a:ext>
             </a:extLst>
           </p:cNvPr>
@@ -7402,7 +7402,7 @@
           <p:cNvPr id="13" name="">
             <a:extLst xmlns:a="http://schemas.openxmlformats.org/drawingml/2006/main">
               <a:ext uri="{FF2B5EF4-FFF2-40B4-BE49-F238E27FC236}">
-                <a16:creationId xmlns:a16="http://schemas.microsoft.com/office/drawing/2014/main" id="{3B4E1D79-D309-496D-84CC-FD07AA370A99}"/>
+                <a16:creationId xmlns:a16="http://schemas.microsoft.com/office/drawing/2014/main" id="{80E093C4-6F05-4949-9EE4-6A72AB63A411}"/>
               </a:ext>
             </a:extLst>
           </p:cNvPr>
@@ -7459,7 +7459,7 @@
           <p:cNvPr id="14" name="">
             <a:extLst xmlns:a="http://schemas.openxmlformats.org/drawingml/2006/main">
               <a:ext uri="{FF2B5EF4-FFF2-40B4-BE49-F238E27FC236}">
-                <a16:creationId xmlns:a16="http://schemas.microsoft.com/office/drawing/2014/main" id="{2B297F27-8815-475E-92E0-BFDA7F09AC74}"/>
+                <a16:creationId xmlns:a16="http://schemas.microsoft.com/office/drawing/2014/main" id="{492B40B6-A19A-44CB-9B25-87C61280EE4F}"/>
               </a:ext>
             </a:extLst>
           </p:cNvPr>
@@ -7516,7 +7516,7 @@
           <p:cNvPr id="15" name="">
             <a:extLst xmlns:a="http://schemas.openxmlformats.org/drawingml/2006/main">
               <a:ext uri="{FF2B5EF4-FFF2-40B4-BE49-F238E27FC236}">
-                <a16:creationId xmlns:a16="http://schemas.microsoft.com/office/drawing/2014/main" id="{B0F7CBF6-40C2-4113-B4B1-633CA483D2E1}"/>
+                <a16:creationId xmlns:a16="http://schemas.microsoft.com/office/drawing/2014/main" id="{0E0FE919-47D9-4F42-965B-7FFA2EAC6D5A}"/>
               </a:ext>
             </a:extLst>
           </p:cNvPr>
@@ -7571,7 +7571,7 @@
     </p:spTree>
     <p:extLst>
       <p:ext uri="{BB962C8B-B14F-4D97-AF65-F5344CB8AC3E}">
-        <p14:creationId xmlns:p14="http://schemas.microsoft.com/office/powerpoint/2010/main" val="340304440"/>
+        <p14:creationId xmlns:p14="http://schemas.microsoft.com/office/powerpoint/2010/main" val="1202250648"/>
       </p:ext>
     </p:extLst>
   </p:cSld>
@@ -7772,7 +7772,7 @@
           <p:cNvPr id="23" name="">
             <a:extLst xmlns:a="http://schemas.openxmlformats.org/drawingml/2006/main">
               <a:ext uri="{FF2B5EF4-FFF2-40B4-BE49-F238E27FC236}">
-                <a16:creationId xmlns:a16="http://schemas.microsoft.com/office/drawing/2014/main" id="{1CD33F6C-6B46-4651-8962-24A7D7E98277}"/>
+                <a16:creationId xmlns:a16="http://schemas.microsoft.com/office/drawing/2014/main" id="{CAA9C98F-38E2-40E7-80C5-6C6600FD042F}"/>
               </a:ext>
             </a:extLst>
           </p:cNvPr>
@@ -7804,7 +7804,7 @@
           <p:cNvPr id="2" name="">
             <a:extLst xmlns:a="http://schemas.openxmlformats.org/drawingml/2006/main">
               <a:ext uri="{FF2B5EF4-FFF2-40B4-BE49-F238E27FC236}">
-                <a16:creationId xmlns:a16="http://schemas.microsoft.com/office/drawing/2014/main" id="{2F5735AA-C6AD-444D-89AE-4C2D992E6688}"/>
+                <a16:creationId xmlns:a16="http://schemas.microsoft.com/office/drawing/2014/main" id="{73C6C029-9CFB-41CF-B931-9A24BF65B678}"/>
               </a:ext>
             </a:extLst>
           </p:cNvPr>
@@ -7861,7 +7861,7 @@
           <p:cNvPr id="3" name="">
             <a:extLst xmlns:a="http://schemas.openxmlformats.org/drawingml/2006/main">
               <a:ext uri="{FF2B5EF4-FFF2-40B4-BE49-F238E27FC236}">
-                <a16:creationId xmlns:a16="http://schemas.microsoft.com/office/drawing/2014/main" id="{B73508BD-CA8D-4745-A3EB-18B2450CD977}"/>
+                <a16:creationId xmlns:a16="http://schemas.microsoft.com/office/drawing/2014/main" id="{C906C88E-E1DF-4043-A09C-791EE634569A}"/>
               </a:ext>
             </a:extLst>
           </p:cNvPr>
@@ -7893,7 +7893,7 @@
           <p:cNvPr id="4" name="">
             <a:extLst xmlns:a="http://schemas.openxmlformats.org/drawingml/2006/main">
               <a:ext uri="{FF2B5EF4-FFF2-40B4-BE49-F238E27FC236}">
-                <a16:creationId xmlns:a16="http://schemas.microsoft.com/office/drawing/2014/main" id="{867775F8-7B54-4600-B329-D30B4546644D}"/>
+                <a16:creationId xmlns:a16="http://schemas.microsoft.com/office/drawing/2014/main" id="{00F1FB99-2B0E-42AD-BCF3-6FB979A075EB}"/>
               </a:ext>
             </a:extLst>
           </p:cNvPr>
@@ -7950,7 +7950,7 @@
           <p:cNvPr id="5" name="">
             <a:extLst xmlns:a="http://schemas.openxmlformats.org/drawingml/2006/main">
               <a:ext uri="{FF2B5EF4-FFF2-40B4-BE49-F238E27FC236}">
-                <a16:creationId xmlns:a16="http://schemas.microsoft.com/office/drawing/2014/main" id="{DF23B7ED-7923-44DE-ACCE-F9874C85B244}"/>
+                <a16:creationId xmlns:a16="http://schemas.microsoft.com/office/drawing/2014/main" id="{45F03D87-1550-43BA-AB9C-9DDBA868715F}"/>
               </a:ext>
             </a:extLst>
           </p:cNvPr>
@@ -8007,7 +8007,7 @@
           <p:cNvPr id="6" name="">
             <a:extLst xmlns:a="http://schemas.openxmlformats.org/drawingml/2006/main">
               <a:ext uri="{FF2B5EF4-FFF2-40B4-BE49-F238E27FC236}">
-                <a16:creationId xmlns:a16="http://schemas.microsoft.com/office/drawing/2014/main" id="{FC9E590D-F474-49A9-AED4-9944E6F03B73}"/>
+                <a16:creationId xmlns:a16="http://schemas.microsoft.com/office/drawing/2014/main" id="{A3DAB471-2188-4EF2-9679-033388BF9AFE}"/>
               </a:ext>
             </a:extLst>
           </p:cNvPr>
@@ -8064,7 +8064,7 @@
           <p:cNvPr id="7" name="">
             <a:extLst xmlns:a="http://schemas.openxmlformats.org/drawingml/2006/main">
               <a:ext uri="{FF2B5EF4-FFF2-40B4-BE49-F238E27FC236}">
-                <a16:creationId xmlns:a16="http://schemas.microsoft.com/office/drawing/2014/main" id="{CA2EFDC3-733A-4123-A3AD-E12A96F3B1E6}"/>
+                <a16:creationId xmlns:a16="http://schemas.microsoft.com/office/drawing/2014/main" id="{9D9B3177-8AD7-4716-98C5-28A588987940}"/>
               </a:ext>
             </a:extLst>
           </p:cNvPr>
@@ -8096,7 +8096,7 @@
           <p:cNvPr id="8" name="">
             <a:extLst xmlns:a="http://schemas.openxmlformats.org/drawingml/2006/main">
               <a:ext uri="{FF2B5EF4-FFF2-40B4-BE49-F238E27FC236}">
-                <a16:creationId xmlns:a16="http://schemas.microsoft.com/office/drawing/2014/main" id="{14F718B9-B64D-440F-8F59-B6690764A4B5}"/>
+                <a16:creationId xmlns:a16="http://schemas.microsoft.com/office/drawing/2014/main" id="{9020941D-1891-4ADB-A5DE-1ABDA57B4463}"/>
               </a:ext>
             </a:extLst>
           </p:cNvPr>
@@ -8153,7 +8153,7 @@
           <p:cNvPr id="9" name="">
             <a:extLst xmlns:a="http://schemas.openxmlformats.org/drawingml/2006/main">
               <a:ext uri="{FF2B5EF4-FFF2-40B4-BE49-F238E27FC236}">
-                <a16:creationId xmlns:a16="http://schemas.microsoft.com/office/drawing/2014/main" id="{D8A769E9-7A8C-468F-B934-29D05D969847}"/>
+                <a16:creationId xmlns:a16="http://schemas.microsoft.com/office/drawing/2014/main" id="{9DDE83CD-7B31-48F7-AF07-B44D2872FDED}"/>
               </a:ext>
             </a:extLst>
           </p:cNvPr>
@@ -8210,19 +8210,19 @@
           <p:cNvPr id="10" name="">
             <a:extLst xmlns:a="http://schemas.openxmlformats.org/drawingml/2006/main">
               <a:ext uri="{FF2B5EF4-FFF2-40B4-BE49-F238E27FC236}">
-                <a16:creationId xmlns:a16="http://schemas.microsoft.com/office/drawing/2014/main" id="{CD0D2BAB-8F65-4201-BA84-70F525AC5AFB}"/>
-              </a:ext>
-            </a:extLst>
-          </p:cNvPr>
-          <p:cNvSpPr>
-            <a:spLocks xmlns:a="http://schemas.openxmlformats.org/drawingml/2006/main" noGrp="1"/>
-          </p:cNvSpPr>
-          <p:nvPr/>
-        </p:nvSpPr>
-        <p:spPr>
-          <a:xfrm xmlns:a="http://schemas.openxmlformats.org/drawingml/2006/main">
-            <a:off x="914400" y="1257300"/>
-            <a:ext cx="10363200" cy="781050"/>
+                <a16:creationId xmlns:a16="http://schemas.microsoft.com/office/drawing/2014/main" id="{70B1467F-BC49-437C-A7AA-77529B8E7190}"/>
+              </a:ext>
+            </a:extLst>
+          </p:cNvPr>
+          <p:cNvSpPr>
+            <a:spLocks xmlns:a="http://schemas.openxmlformats.org/drawingml/2006/main" noGrp="1"/>
+          </p:cNvSpPr>
+          <p:nvPr/>
+        </p:nvSpPr>
+        <p:spPr>
+          <a:xfrm xmlns:a="http://schemas.openxmlformats.org/drawingml/2006/main">
+            <a:off x="857250" y="1219200"/>
+            <a:ext cx="10477500" cy="742950"/>
           </a:xfrm>
           <a:prstGeom xmlns:a="http://schemas.openxmlformats.org/drawingml/2006/main" prst="rect">
             <a:avLst/>
@@ -8239,7 +8239,7 @@
           <a:lstStyle xmlns:a="http://schemas.openxmlformats.org/drawingml/2006/main"/>
           <a:p xmlns:a="http://schemas.openxmlformats.org/drawingml/2006/main">
             <a:pPr algn="ctr">
-              <a:defRPr sz="2175" b="1">
+              <a:defRPr sz="2100" b="1">
                 <a:solidFill>
                   <a:srgbClr val="17253A"/>
                 </a:solidFill>
@@ -8249,7 +8249,7 @@
               </a:defRPr>
             </a:pPr>
             <a:r>
-              <a:rPr sz="2175" b="1">
+              <a:rPr sz="2100" b="1">
                 <a:solidFill>
                   <a:srgbClr val="17253A"/>
                 </a:solidFill>
@@ -8267,28 +8267,30 @@
           <p:cNvPr id="11" name="">
             <a:extLst xmlns:a="http://schemas.openxmlformats.org/drawingml/2006/main">
               <a:ext uri="{FF2B5EF4-FFF2-40B4-BE49-F238E27FC236}">
-                <a16:creationId xmlns:a16="http://schemas.microsoft.com/office/drawing/2014/main" id="{FA14E0A6-E96F-409E-88B9-A32AB3CE3D61}"/>
-              </a:ext>
-            </a:extLst>
-          </p:cNvPr>
-          <p:cNvSpPr>
-            <a:spLocks xmlns:a="http://schemas.openxmlformats.org/drawingml/2006/main" noGrp="1"/>
-          </p:cNvSpPr>
-          <p:nvPr/>
-        </p:nvSpPr>
-        <p:spPr>
-          <a:xfrm xmlns:a="http://schemas.openxmlformats.org/drawingml/2006/main">
-            <a:off x="1000125" y="2247900"/>
-            <a:ext cx="476250" cy="476250"/>
-          </a:xfrm>
-          <a:prstGeom xmlns:a="http://schemas.openxmlformats.org/drawingml/2006/main" prst="ellipse">
+                <a16:creationId xmlns:a16="http://schemas.microsoft.com/office/drawing/2014/main" id="{6F7E627C-FE18-475F-8791-71B1B80F9D1F}"/>
+              </a:ext>
+            </a:extLst>
+          </p:cNvPr>
+          <p:cNvSpPr>
+            <a:spLocks xmlns:a="http://schemas.openxmlformats.org/drawingml/2006/main" noGrp="1"/>
+          </p:cNvSpPr>
+          <p:nvPr/>
+        </p:nvSpPr>
+        <p:spPr>
+          <a:xfrm xmlns:a="http://schemas.openxmlformats.org/drawingml/2006/main">
+            <a:off x="971550" y="2124075"/>
+            <a:ext cx="38100" cy="3524250"/>
+          </a:xfrm>
+          <a:prstGeom xmlns:a="http://schemas.openxmlformats.org/drawingml/2006/main" prst="rect">
             <a:avLst/>
           </a:prstGeom>
           <a:solidFill xmlns:a="http://schemas.openxmlformats.org/drawingml/2006/main">
-            <a:srgbClr val="18324A"/>
+            <a:srgbClr val="2C6E73"/>
           </a:solidFill>
           <a:ln xmlns:a="http://schemas.openxmlformats.org/drawingml/2006/main" w="0">
-            <a:noFill/>
+            <a:solidFill>
+              <a:srgbClr val="2C6E73"/>
+            </a:solidFill>
           </a:ln>
         </p:spPr>
       </p:sp>
@@ -8297,19 +8299,19 @@
           <p:cNvPr id="12" name="">
             <a:extLst xmlns:a="http://schemas.openxmlformats.org/drawingml/2006/main">
               <a:ext uri="{FF2B5EF4-FFF2-40B4-BE49-F238E27FC236}">
-                <a16:creationId xmlns:a16="http://schemas.microsoft.com/office/drawing/2014/main" id="{C5FFCD53-F10A-4ED3-83C3-DDAE8A9BD89A}"/>
-              </a:ext>
-            </a:extLst>
-          </p:cNvPr>
-          <p:cNvSpPr>
-            <a:spLocks xmlns:a="http://schemas.openxmlformats.org/drawingml/2006/main" noGrp="1"/>
-          </p:cNvSpPr>
-          <p:nvPr/>
-        </p:nvSpPr>
-        <p:spPr>
-          <a:xfrm xmlns:a="http://schemas.openxmlformats.org/drawingml/2006/main">
-            <a:off x="1000125" y="2276475"/>
-            <a:ext cx="476250" cy="419100"/>
+                <a16:creationId xmlns:a16="http://schemas.microsoft.com/office/drawing/2014/main" id="{F5444498-1513-40E6-B57F-6C3FF3655F19}"/>
+              </a:ext>
+            </a:extLst>
+          </p:cNvPr>
+          <p:cNvSpPr>
+            <a:spLocks xmlns:a="http://schemas.openxmlformats.org/drawingml/2006/main" noGrp="1"/>
+          </p:cNvSpPr>
+          <p:nvPr/>
+        </p:nvSpPr>
+        <p:spPr>
+          <a:xfrm xmlns:a="http://schemas.openxmlformats.org/drawingml/2006/main">
+            <a:off x="1162050" y="2200275"/>
+            <a:ext cx="400050" cy="400050"/>
           </a:xfrm>
           <a:prstGeom xmlns:a="http://schemas.openxmlformats.org/drawingml/2006/main" prst="rect">
             <a:avLst/>
@@ -8326,9 +8328,9 @@
           <a:lstStyle xmlns:a="http://schemas.openxmlformats.org/drawingml/2006/main"/>
           <a:p xmlns:a="http://schemas.openxmlformats.org/drawingml/2006/main">
             <a:pPr algn="ctr">
-              <a:defRPr sz="1350" b="1">
-                <a:solidFill>
-                  <a:srgbClr val="FFFFFF"/>
+              <a:defRPr sz="1125" b="1">
+                <a:solidFill>
+                  <a:srgbClr val="2C6E73"/>
                 </a:solidFill>
                 <a:latin typeface="Arial"/>
                 <a:ea typeface="Arial"/>
@@ -8336,9 +8338,9 @@
               </a:defRPr>
             </a:pPr>
             <a:r>
-              <a:rPr sz="1350" b="1">
-                <a:solidFill>
-                  <a:srgbClr val="FFFFFF"/>
+              <a:rPr sz="1125" b="1">
+                <a:solidFill>
+                  <a:srgbClr val="2C6E73"/>
                 </a:solidFill>
                 <a:latin typeface="Arial"/>
                 <a:ea typeface="Arial"/>
@@ -8354,19 +8356,19 @@
           <p:cNvPr id="13" name="">
             <a:extLst xmlns:a="http://schemas.openxmlformats.org/drawingml/2006/main">
               <a:ext uri="{FF2B5EF4-FFF2-40B4-BE49-F238E27FC236}">
-                <a16:creationId xmlns:a16="http://schemas.microsoft.com/office/drawing/2014/main" id="{37A1AB05-3005-4B0A-B616-9A2B4CC65291}"/>
-              </a:ext>
-            </a:extLst>
-          </p:cNvPr>
-          <p:cNvSpPr>
-            <a:spLocks xmlns:a="http://schemas.openxmlformats.org/drawingml/2006/main" noGrp="1"/>
-          </p:cNvSpPr>
-          <p:nvPr/>
-        </p:nvSpPr>
-        <p:spPr>
-          <a:xfrm xmlns:a="http://schemas.openxmlformats.org/drawingml/2006/main">
-            <a:off x="1714500" y="2181225"/>
-            <a:ext cx="9429750" cy="609600"/>
+                <a16:creationId xmlns:a16="http://schemas.microsoft.com/office/drawing/2014/main" id="{B9F41C69-E2B5-4806-8129-882F5692C71F}"/>
+              </a:ext>
+            </a:extLst>
+          </p:cNvPr>
+          <p:cNvSpPr>
+            <a:spLocks xmlns:a="http://schemas.openxmlformats.org/drawingml/2006/main" noGrp="1"/>
+          </p:cNvSpPr>
+          <p:nvPr/>
+        </p:nvSpPr>
+        <p:spPr>
+          <a:xfrm xmlns:a="http://schemas.openxmlformats.org/drawingml/2006/main">
+            <a:off x="1714500" y="2114550"/>
+            <a:ext cx="9525000" cy="809625"/>
           </a:xfrm>
           <a:prstGeom xmlns:a="http://schemas.openxmlformats.org/drawingml/2006/main" prst="rect">
             <a:avLst/>
@@ -8383,7 +8385,7 @@
           <a:lstStyle xmlns:a="http://schemas.openxmlformats.org/drawingml/2006/main"/>
           <a:p xmlns:a="http://schemas.openxmlformats.org/drawingml/2006/main">
             <a:pPr algn="l">
-              <a:defRPr sz="1500" b="0">
+              <a:defRPr sz="1725" b="0">
                 <a:solidFill>
                   <a:srgbClr val="17253A"/>
                 </a:solidFill>
@@ -8393,7 +8395,7 @@
               </a:defRPr>
             </a:pPr>
             <a:r>
-              <a:rPr sz="1500" b="0">
+              <a:rPr sz="1725" b="0">
                 <a:solidFill>
                   <a:srgbClr val="17253A"/>
                 </a:solidFill>
@@ -8401,7 +8403,7 @@
                 <a:ea typeface="Arial"/>
                 <a:cs typeface="Arial"/>
               </a:rPr>
-              <a:t>Identify the structure: Identify what changes and what stays constant.</a:t>
+              <a:t>n tickets at £6 each → 6n</a:t>
             </a:r>
           </a:p>
         </p:txBody>
@@ -8411,28 +8413,30 @@
           <p:cNvPr id="14" name="">
             <a:extLst xmlns:a="http://schemas.openxmlformats.org/drawingml/2006/main">
               <a:ext uri="{FF2B5EF4-FFF2-40B4-BE49-F238E27FC236}">
-                <a16:creationId xmlns:a16="http://schemas.microsoft.com/office/drawing/2014/main" id="{AA26378F-32F5-4BB1-95E9-46155254F738}"/>
-              </a:ext>
-            </a:extLst>
-          </p:cNvPr>
-          <p:cNvSpPr>
-            <a:spLocks xmlns:a="http://schemas.openxmlformats.org/drawingml/2006/main" noGrp="1"/>
-          </p:cNvSpPr>
-          <p:nvPr/>
-        </p:nvSpPr>
-        <p:spPr>
-          <a:xfrm xmlns:a="http://schemas.openxmlformats.org/drawingml/2006/main">
-            <a:off x="1000125" y="2990850"/>
-            <a:ext cx="476250" cy="476250"/>
-          </a:xfrm>
-          <a:prstGeom xmlns:a="http://schemas.openxmlformats.org/drawingml/2006/main" prst="ellipse">
+                <a16:creationId xmlns:a16="http://schemas.microsoft.com/office/drawing/2014/main" id="{EEED4259-36B9-41C1-B3C4-C8EEBFEBB5C4}"/>
+              </a:ext>
+            </a:extLst>
+          </p:cNvPr>
+          <p:cNvSpPr>
+            <a:spLocks xmlns:a="http://schemas.openxmlformats.org/drawingml/2006/main" noGrp="1"/>
+          </p:cNvSpPr>
+          <p:nvPr/>
+        </p:nvSpPr>
+        <p:spPr>
+          <a:xfrm xmlns:a="http://schemas.openxmlformats.org/drawingml/2006/main">
+            <a:off x="1714500" y="2943225"/>
+            <a:ext cx="9334500" cy="9525"/>
+          </a:xfrm>
+          <a:prstGeom xmlns:a="http://schemas.openxmlformats.org/drawingml/2006/main" prst="rect">
             <a:avLst/>
           </a:prstGeom>
           <a:solidFill xmlns:a="http://schemas.openxmlformats.org/drawingml/2006/main">
-            <a:srgbClr val="2C6E73"/>
+            <a:srgbClr val="D9E0E6"/>
           </a:solidFill>
           <a:ln xmlns:a="http://schemas.openxmlformats.org/drawingml/2006/main" w="0">
-            <a:noFill/>
+            <a:solidFill>
+              <a:srgbClr val="D9E0E6"/>
+            </a:solidFill>
           </a:ln>
         </p:spPr>
       </p:sp>
@@ -8441,19 +8445,19 @@
           <p:cNvPr id="15" name="">
             <a:extLst xmlns:a="http://schemas.openxmlformats.org/drawingml/2006/main">
               <a:ext uri="{FF2B5EF4-FFF2-40B4-BE49-F238E27FC236}">
-                <a16:creationId xmlns:a16="http://schemas.microsoft.com/office/drawing/2014/main" id="{851A7ED3-3356-47D3-8490-E0FC77C43EB7}"/>
-              </a:ext>
-            </a:extLst>
-          </p:cNvPr>
-          <p:cNvSpPr>
-            <a:spLocks xmlns:a="http://schemas.openxmlformats.org/drawingml/2006/main" noGrp="1"/>
-          </p:cNvSpPr>
-          <p:nvPr/>
-        </p:nvSpPr>
-        <p:spPr>
-          <a:xfrm xmlns:a="http://schemas.openxmlformats.org/drawingml/2006/main">
-            <a:off x="1000125" y="3019425"/>
-            <a:ext cx="476250" cy="419100"/>
+                <a16:creationId xmlns:a16="http://schemas.microsoft.com/office/drawing/2014/main" id="{C46536A5-2D21-4080-8954-33E69E669788}"/>
+              </a:ext>
+            </a:extLst>
+          </p:cNvPr>
+          <p:cNvSpPr>
+            <a:spLocks xmlns:a="http://schemas.openxmlformats.org/drawingml/2006/main" noGrp="1"/>
+          </p:cNvSpPr>
+          <p:nvPr/>
+        </p:nvSpPr>
+        <p:spPr>
+          <a:xfrm xmlns:a="http://schemas.openxmlformats.org/drawingml/2006/main">
+            <a:off x="1162050" y="3076575"/>
+            <a:ext cx="400050" cy="400050"/>
           </a:xfrm>
           <a:prstGeom xmlns:a="http://schemas.openxmlformats.org/drawingml/2006/main" prst="rect">
             <a:avLst/>
@@ -8470,9 +8474,9 @@
           <a:lstStyle xmlns:a="http://schemas.openxmlformats.org/drawingml/2006/main"/>
           <a:p xmlns:a="http://schemas.openxmlformats.org/drawingml/2006/main">
             <a:pPr algn="ctr">
-              <a:defRPr sz="1350" b="1">
-                <a:solidFill>
-                  <a:srgbClr val="FFFFFF"/>
+              <a:defRPr sz="1125" b="1">
+                <a:solidFill>
+                  <a:srgbClr val="2C6E73"/>
                 </a:solidFill>
                 <a:latin typeface="Arial"/>
                 <a:ea typeface="Arial"/>
@@ -8480,9 +8484,9 @@
               </a:defRPr>
             </a:pPr>
             <a:r>
-              <a:rPr sz="1350" b="1">
-                <a:solidFill>
-                  <a:srgbClr val="FFFFFF"/>
+              <a:rPr sz="1125" b="1">
+                <a:solidFill>
+                  <a:srgbClr val="2C6E73"/>
                 </a:solidFill>
                 <a:latin typeface="Arial"/>
                 <a:ea typeface="Arial"/>
@@ -8498,19 +8502,19 @@
           <p:cNvPr id="16" name="">
             <a:extLst xmlns:a="http://schemas.openxmlformats.org/drawingml/2006/main">
               <a:ext uri="{FF2B5EF4-FFF2-40B4-BE49-F238E27FC236}">
-                <a16:creationId xmlns:a16="http://schemas.microsoft.com/office/drawing/2014/main" id="{7B9E5274-BFD8-4A8B-BC88-3220F95A36F8}"/>
-              </a:ext>
-            </a:extLst>
-          </p:cNvPr>
-          <p:cNvSpPr>
-            <a:spLocks xmlns:a="http://schemas.openxmlformats.org/drawingml/2006/main" noGrp="1"/>
-          </p:cNvSpPr>
-          <p:nvPr/>
-        </p:nvSpPr>
-        <p:spPr>
-          <a:xfrm xmlns:a="http://schemas.openxmlformats.org/drawingml/2006/main">
-            <a:off x="1714500" y="2924175"/>
-            <a:ext cx="9429750" cy="609600"/>
+                <a16:creationId xmlns:a16="http://schemas.microsoft.com/office/drawing/2014/main" id="{021092B7-6A12-478D-AABC-6D37CF613270}"/>
+              </a:ext>
+            </a:extLst>
+          </p:cNvPr>
+          <p:cNvSpPr>
+            <a:spLocks xmlns:a="http://schemas.openxmlformats.org/drawingml/2006/main" noGrp="1"/>
+          </p:cNvSpPr>
+          <p:nvPr/>
+        </p:nvSpPr>
+        <p:spPr>
+          <a:xfrm xmlns:a="http://schemas.openxmlformats.org/drawingml/2006/main">
+            <a:off x="1714500" y="2990850"/>
+            <a:ext cx="9525000" cy="809625"/>
           </a:xfrm>
           <a:prstGeom xmlns:a="http://schemas.openxmlformats.org/drawingml/2006/main" prst="rect">
             <a:avLst/>
@@ -8527,7 +8531,7 @@
           <a:lstStyle xmlns:a="http://schemas.openxmlformats.org/drawingml/2006/main"/>
           <a:p xmlns:a="http://schemas.openxmlformats.org/drawingml/2006/main">
             <a:pPr algn="l">
-              <a:defRPr sz="1500" b="0">
+              <a:defRPr sz="1725" b="0">
                 <a:solidFill>
                   <a:srgbClr val="17253A"/>
                 </a:solidFill>
@@ -8537,7 +8541,7 @@
               </a:defRPr>
             </a:pPr>
             <a:r>
-              <a:rPr sz="1500" b="0">
+              <a:rPr sz="1725" b="0">
                 <a:solidFill>
                   <a:srgbClr val="17253A"/>
                 </a:solidFill>
@@ -8545,7 +8549,7 @@
                 <a:ea typeface="Arial"/>
                 <a:cs typeface="Arial"/>
               </a:rPr>
-              <a:t>Set up the method: Express the relationship with words, a table or a formula.</a:t>
+              <a:t>Add one £4 booking fee</a:t>
             </a:r>
           </a:p>
         </p:txBody>
@@ -8555,28 +8559,30 @@
           <p:cNvPr id="17" name="">
             <a:extLst xmlns:a="http://schemas.openxmlformats.org/drawingml/2006/main">
               <a:ext uri="{FF2B5EF4-FFF2-40B4-BE49-F238E27FC236}">
-                <a16:creationId xmlns:a16="http://schemas.microsoft.com/office/drawing/2014/main" id="{103D3974-BF89-4AA1-A3B7-0E47F5941AA1}"/>
-              </a:ext>
-            </a:extLst>
-          </p:cNvPr>
-          <p:cNvSpPr>
-            <a:spLocks xmlns:a="http://schemas.openxmlformats.org/drawingml/2006/main" noGrp="1"/>
-          </p:cNvSpPr>
-          <p:nvPr/>
-        </p:nvSpPr>
-        <p:spPr>
-          <a:xfrm xmlns:a="http://schemas.openxmlformats.org/drawingml/2006/main">
-            <a:off x="1000125" y="3733800"/>
-            <a:ext cx="476250" cy="476250"/>
-          </a:xfrm>
-          <a:prstGeom xmlns:a="http://schemas.openxmlformats.org/drawingml/2006/main" prst="ellipse">
+                <a16:creationId xmlns:a16="http://schemas.microsoft.com/office/drawing/2014/main" id="{E053BEA3-555F-49F7-BD3F-8400932365F9}"/>
+              </a:ext>
+            </a:extLst>
+          </p:cNvPr>
+          <p:cNvSpPr>
+            <a:spLocks xmlns:a="http://schemas.openxmlformats.org/drawingml/2006/main" noGrp="1"/>
+          </p:cNvSpPr>
+          <p:nvPr/>
+        </p:nvSpPr>
+        <p:spPr>
+          <a:xfrm xmlns:a="http://schemas.openxmlformats.org/drawingml/2006/main">
+            <a:off x="1714500" y="3819525"/>
+            <a:ext cx="9334500" cy="9525"/>
+          </a:xfrm>
+          <a:prstGeom xmlns:a="http://schemas.openxmlformats.org/drawingml/2006/main" prst="rect">
             <a:avLst/>
           </a:prstGeom>
           <a:solidFill xmlns:a="http://schemas.openxmlformats.org/drawingml/2006/main">
-            <a:srgbClr val="2C6E73"/>
+            <a:srgbClr val="D9E0E6"/>
           </a:solidFill>
           <a:ln xmlns:a="http://schemas.openxmlformats.org/drawingml/2006/main" w="0">
-            <a:noFill/>
+            <a:solidFill>
+              <a:srgbClr val="D9E0E6"/>
+            </a:solidFill>
           </a:ln>
         </p:spPr>
       </p:sp>
@@ -8585,19 +8591,19 @@
           <p:cNvPr id="18" name="">
             <a:extLst xmlns:a="http://schemas.openxmlformats.org/drawingml/2006/main">
               <a:ext uri="{FF2B5EF4-FFF2-40B4-BE49-F238E27FC236}">
-                <a16:creationId xmlns:a16="http://schemas.microsoft.com/office/drawing/2014/main" id="{6BF1D586-CD5A-4343-A26D-94F2C8E5B0BF}"/>
-              </a:ext>
-            </a:extLst>
-          </p:cNvPr>
-          <p:cNvSpPr>
-            <a:spLocks xmlns:a="http://schemas.openxmlformats.org/drawingml/2006/main" noGrp="1"/>
-          </p:cNvSpPr>
-          <p:nvPr/>
-        </p:nvSpPr>
-        <p:spPr>
-          <a:xfrm xmlns:a="http://schemas.openxmlformats.org/drawingml/2006/main">
-            <a:off x="1000125" y="3762375"/>
-            <a:ext cx="476250" cy="419100"/>
+                <a16:creationId xmlns:a16="http://schemas.microsoft.com/office/drawing/2014/main" id="{6943248F-A997-4EA6-95DA-1893C9757BC6}"/>
+              </a:ext>
+            </a:extLst>
+          </p:cNvPr>
+          <p:cNvSpPr>
+            <a:spLocks xmlns:a="http://schemas.openxmlformats.org/drawingml/2006/main" noGrp="1"/>
+          </p:cNvSpPr>
+          <p:nvPr/>
+        </p:nvSpPr>
+        <p:spPr>
+          <a:xfrm xmlns:a="http://schemas.openxmlformats.org/drawingml/2006/main">
+            <a:off x="1162050" y="3952875"/>
+            <a:ext cx="400050" cy="400050"/>
           </a:xfrm>
           <a:prstGeom xmlns:a="http://schemas.openxmlformats.org/drawingml/2006/main" prst="rect">
             <a:avLst/>
@@ -8614,9 +8620,9 @@
           <a:lstStyle xmlns:a="http://schemas.openxmlformats.org/drawingml/2006/main"/>
           <a:p xmlns:a="http://schemas.openxmlformats.org/drawingml/2006/main">
             <a:pPr algn="ctr">
-              <a:defRPr sz="1350" b="1">
-                <a:solidFill>
-                  <a:srgbClr val="FFFFFF"/>
+              <a:defRPr sz="1125" b="1">
+                <a:solidFill>
+                  <a:srgbClr val="2C6E73"/>
                 </a:solidFill>
                 <a:latin typeface="Arial"/>
                 <a:ea typeface="Arial"/>
@@ -8624,9 +8630,9 @@
               </a:defRPr>
             </a:pPr>
             <a:r>
-              <a:rPr sz="1350" b="1">
-                <a:solidFill>
-                  <a:srgbClr val="FFFFFF"/>
+              <a:rPr sz="1125" b="1">
+                <a:solidFill>
+                  <a:srgbClr val="2C6E73"/>
                 </a:solidFill>
                 <a:latin typeface="Arial"/>
                 <a:ea typeface="Arial"/>
@@ -8642,19 +8648,19 @@
           <p:cNvPr id="19" name="">
             <a:extLst xmlns:a="http://schemas.openxmlformats.org/drawingml/2006/main">
               <a:ext uri="{FF2B5EF4-FFF2-40B4-BE49-F238E27FC236}">
-                <a16:creationId xmlns:a16="http://schemas.microsoft.com/office/drawing/2014/main" id="{60BD88C5-5C23-47E3-ADD2-78C3F4AE01E7}"/>
-              </a:ext>
-            </a:extLst>
-          </p:cNvPr>
-          <p:cNvSpPr>
-            <a:spLocks xmlns:a="http://schemas.openxmlformats.org/drawingml/2006/main" noGrp="1"/>
-          </p:cNvSpPr>
-          <p:nvPr/>
-        </p:nvSpPr>
-        <p:spPr>
-          <a:xfrm xmlns:a="http://schemas.openxmlformats.org/drawingml/2006/main">
-            <a:off x="1714500" y="3667125"/>
-            <a:ext cx="9429750" cy="609600"/>
+                <a16:creationId xmlns:a16="http://schemas.microsoft.com/office/drawing/2014/main" id="{F731DD33-39DF-4772-9A6A-9970965D6089}"/>
+              </a:ext>
+            </a:extLst>
+          </p:cNvPr>
+          <p:cNvSpPr>
+            <a:spLocks xmlns:a="http://schemas.openxmlformats.org/drawingml/2006/main" noGrp="1"/>
+          </p:cNvSpPr>
+          <p:nvPr/>
+        </p:nvSpPr>
+        <p:spPr>
+          <a:xfrm xmlns:a="http://schemas.openxmlformats.org/drawingml/2006/main">
+            <a:off x="1714500" y="3867150"/>
+            <a:ext cx="9525000" cy="809625"/>
           </a:xfrm>
           <a:prstGeom xmlns:a="http://schemas.openxmlformats.org/drawingml/2006/main" prst="rect">
             <a:avLst/>
@@ -8671,7 +8677,7 @@
           <a:lstStyle xmlns:a="http://schemas.openxmlformats.org/drawingml/2006/main"/>
           <a:p xmlns:a="http://schemas.openxmlformats.org/drawingml/2006/main">
             <a:pPr algn="l">
-              <a:defRPr sz="1500" b="0">
+              <a:defRPr sz="1725" b="0">
                 <a:solidFill>
                   <a:srgbClr val="17253A"/>
                 </a:solidFill>
@@ -8681,7 +8687,7 @@
               </a:defRPr>
             </a:pPr>
             <a:r>
-              <a:rPr sz="1500" b="0">
+              <a:rPr sz="1725" b="0">
                 <a:solidFill>
                   <a:srgbClr val="17253A"/>
                 </a:solidFill>
@@ -8689,7 +8695,7 @@
                 <a:ea typeface="Arial"/>
                 <a:cs typeface="Arial"/>
               </a:rPr>
-              <a:t>Complete the calculation: C = 6n + 4.</a:t>
+              <a:t>Cost = ticket cost + booking fee</a:t>
             </a:r>
           </a:p>
         </p:txBody>
@@ -8699,28 +8705,30 @@
           <p:cNvPr id="20" name="">
             <a:extLst xmlns:a="http://schemas.openxmlformats.org/drawingml/2006/main">
               <a:ext uri="{FF2B5EF4-FFF2-40B4-BE49-F238E27FC236}">
-                <a16:creationId xmlns:a16="http://schemas.microsoft.com/office/drawing/2014/main" id="{4BD606BB-D889-4311-8D2F-C5B6EB9A5137}"/>
-              </a:ext>
-            </a:extLst>
-          </p:cNvPr>
-          <p:cNvSpPr>
-            <a:spLocks xmlns:a="http://schemas.openxmlformats.org/drawingml/2006/main" noGrp="1"/>
-          </p:cNvSpPr>
-          <p:nvPr/>
-        </p:nvSpPr>
-        <p:spPr>
-          <a:xfrm xmlns:a="http://schemas.openxmlformats.org/drawingml/2006/main">
-            <a:off x="1000125" y="4476750"/>
-            <a:ext cx="476250" cy="476250"/>
-          </a:xfrm>
-          <a:prstGeom xmlns:a="http://schemas.openxmlformats.org/drawingml/2006/main" prst="ellipse">
+                <a16:creationId xmlns:a16="http://schemas.microsoft.com/office/drawing/2014/main" id="{DD22AFD0-CA7D-4828-AF22-48564E407357}"/>
+              </a:ext>
+            </a:extLst>
+          </p:cNvPr>
+          <p:cNvSpPr>
+            <a:spLocks xmlns:a="http://schemas.openxmlformats.org/drawingml/2006/main" noGrp="1"/>
+          </p:cNvSpPr>
+          <p:nvPr/>
+        </p:nvSpPr>
+        <p:spPr>
+          <a:xfrm xmlns:a="http://schemas.openxmlformats.org/drawingml/2006/main">
+            <a:off x="1714500" y="4695825"/>
+            <a:ext cx="9334500" cy="9525"/>
+          </a:xfrm>
+          <a:prstGeom xmlns:a="http://schemas.openxmlformats.org/drawingml/2006/main" prst="rect">
             <a:avLst/>
           </a:prstGeom>
           <a:solidFill xmlns:a="http://schemas.openxmlformats.org/drawingml/2006/main">
-            <a:srgbClr val="2C6E73"/>
+            <a:srgbClr val="D9E0E6"/>
           </a:solidFill>
           <a:ln xmlns:a="http://schemas.openxmlformats.org/drawingml/2006/main" w="0">
-            <a:noFill/>
+            <a:solidFill>
+              <a:srgbClr val="D9E0E6"/>
+            </a:solidFill>
           </a:ln>
         </p:spPr>
       </p:sp>
@@ -8729,19 +8737,19 @@
           <p:cNvPr id="21" name="">
             <a:extLst xmlns:a="http://schemas.openxmlformats.org/drawingml/2006/main">
               <a:ext uri="{FF2B5EF4-FFF2-40B4-BE49-F238E27FC236}">
-                <a16:creationId xmlns:a16="http://schemas.microsoft.com/office/drawing/2014/main" id="{B39D6E81-7F4F-481E-800B-65B0460CF1C8}"/>
-              </a:ext>
-            </a:extLst>
-          </p:cNvPr>
-          <p:cNvSpPr>
-            <a:spLocks xmlns:a="http://schemas.openxmlformats.org/drawingml/2006/main" noGrp="1"/>
-          </p:cNvSpPr>
-          <p:nvPr/>
-        </p:nvSpPr>
-        <p:spPr>
-          <a:xfrm xmlns:a="http://schemas.openxmlformats.org/drawingml/2006/main">
-            <a:off x="1000125" y="4505325"/>
-            <a:ext cx="476250" cy="419100"/>
+                <a16:creationId xmlns:a16="http://schemas.microsoft.com/office/drawing/2014/main" id="{4B1F15CE-80FD-4918-8E3D-161C5AEDB85A}"/>
+              </a:ext>
+            </a:extLst>
+          </p:cNvPr>
+          <p:cNvSpPr>
+            <a:spLocks xmlns:a="http://schemas.openxmlformats.org/drawingml/2006/main" noGrp="1"/>
+          </p:cNvSpPr>
+          <p:nvPr/>
+        </p:nvSpPr>
+        <p:spPr>
+          <a:xfrm xmlns:a="http://schemas.openxmlformats.org/drawingml/2006/main">
+            <a:off x="1162050" y="4829175"/>
+            <a:ext cx="400050" cy="400050"/>
           </a:xfrm>
           <a:prstGeom xmlns:a="http://schemas.openxmlformats.org/drawingml/2006/main" prst="rect">
             <a:avLst/>
@@ -8758,9 +8766,9 @@
           <a:lstStyle xmlns:a="http://schemas.openxmlformats.org/drawingml/2006/main"/>
           <a:p xmlns:a="http://schemas.openxmlformats.org/drawingml/2006/main">
             <a:pPr algn="ctr">
-              <a:defRPr sz="1350" b="1">
-                <a:solidFill>
-                  <a:srgbClr val="FFFFFF"/>
+              <a:defRPr sz="1125" b="1">
+                <a:solidFill>
+                  <a:srgbClr val="2F785D"/>
                 </a:solidFill>
                 <a:latin typeface="Arial"/>
                 <a:ea typeface="Arial"/>
@@ -8768,9 +8776,9 @@
               </a:defRPr>
             </a:pPr>
             <a:r>
-              <a:rPr sz="1350" b="1">
-                <a:solidFill>
-                  <a:srgbClr val="FFFFFF"/>
+              <a:rPr sz="1125" b="1">
+                <a:solidFill>
+                  <a:srgbClr val="2F785D"/>
                 </a:solidFill>
                 <a:latin typeface="Arial"/>
                 <a:ea typeface="Arial"/>
@@ -8786,19 +8794,19 @@
           <p:cNvPr id="22" name="">
             <a:extLst xmlns:a="http://schemas.openxmlformats.org/drawingml/2006/main">
               <a:ext uri="{FF2B5EF4-FFF2-40B4-BE49-F238E27FC236}">
-                <a16:creationId xmlns:a16="http://schemas.microsoft.com/office/drawing/2014/main" id="{CC72D285-92F8-411F-9D20-F57C097ADD7C}"/>
-              </a:ext>
-            </a:extLst>
-          </p:cNvPr>
-          <p:cNvSpPr>
-            <a:spLocks xmlns:a="http://schemas.openxmlformats.org/drawingml/2006/main" noGrp="1"/>
-          </p:cNvSpPr>
-          <p:nvPr/>
-        </p:nvSpPr>
-        <p:spPr>
-          <a:xfrm xmlns:a="http://schemas.openxmlformats.org/drawingml/2006/main">
-            <a:off x="1714500" y="4410075"/>
-            <a:ext cx="9429750" cy="609600"/>
+                <a16:creationId xmlns:a16="http://schemas.microsoft.com/office/drawing/2014/main" id="{FC012F0E-DF91-4795-916D-E62ECBCBABE1}"/>
+              </a:ext>
+            </a:extLst>
+          </p:cNvPr>
+          <p:cNvSpPr>
+            <a:spLocks xmlns:a="http://schemas.openxmlformats.org/drawingml/2006/main" noGrp="1"/>
+          </p:cNvSpPr>
+          <p:nvPr/>
+        </p:nvSpPr>
+        <p:spPr>
+          <a:xfrm xmlns:a="http://schemas.openxmlformats.org/drawingml/2006/main">
+            <a:off x="1714500" y="4743450"/>
+            <a:ext cx="9525000" cy="809625"/>
           </a:xfrm>
           <a:prstGeom xmlns:a="http://schemas.openxmlformats.org/drawingml/2006/main" prst="rect">
             <a:avLst/>
@@ -8815,7 +8823,7 @@
           <a:lstStyle xmlns:a="http://schemas.openxmlformats.org/drawingml/2006/main"/>
           <a:p xmlns:a="http://schemas.openxmlformats.org/drawingml/2006/main">
             <a:pPr algn="l">
-              <a:defRPr sz="1500" b="1">
+              <a:defRPr sz="1725" b="1">
                 <a:solidFill>
                   <a:srgbClr val="2F785D"/>
                 </a:solidFill>
@@ -8825,7 +8833,7 @@
               </a:defRPr>
             </a:pPr>
             <a:r>
-              <a:rPr sz="1500" b="1">
+              <a:rPr sz="1725" b="1">
                 <a:solidFill>
                   <a:srgbClr val="2F785D"/>
                 </a:solidFill>
@@ -8833,7 +8841,7 @@
                 <a:ea typeface="Arial"/>
                 <a:cs typeface="Arial"/>
               </a:rPr>
-              <a:t>Check the result: Substitute carefully and check against known terms.</a:t>
+              <a:t>C = 6n + 4</a:t>
             </a:r>
           </a:p>
         </p:txBody>
@@ -8841,7 +8849,7 @@
     </p:spTree>
     <p:extLst>
       <p:ext uri="{BB962C8B-B14F-4D97-AF65-F5344CB8AC3E}">
-        <p14:creationId xmlns:p14="http://schemas.microsoft.com/office/powerpoint/2010/main" val="116360165"/>
+        <p14:creationId xmlns:p14="http://schemas.microsoft.com/office/powerpoint/2010/main" val="671408916"/>
       </p:ext>
     </p:extLst>
   </p:cSld>
@@ -9134,7 +9142,7 @@
           <p:cNvPr id="15" name="">
             <a:extLst xmlns:a="http://schemas.openxmlformats.org/drawingml/2006/main">
               <a:ext uri="{FF2B5EF4-FFF2-40B4-BE49-F238E27FC236}">
-                <a16:creationId xmlns:a16="http://schemas.microsoft.com/office/drawing/2014/main" id="{A97A5443-B3E5-42A5-A103-B61A4FD44187}"/>
+                <a16:creationId xmlns:a16="http://schemas.microsoft.com/office/drawing/2014/main" id="{714444D9-EA62-4A0F-A6D2-47B3B46DEA66}"/>
               </a:ext>
             </a:extLst>
           </p:cNvPr>
@@ -9166,7 +9174,7 @@
           <p:cNvPr id="2" name="">
             <a:extLst xmlns:a="http://schemas.openxmlformats.org/drawingml/2006/main">
               <a:ext uri="{FF2B5EF4-FFF2-40B4-BE49-F238E27FC236}">
-                <a16:creationId xmlns:a16="http://schemas.microsoft.com/office/drawing/2014/main" id="{03575A30-E481-4E10-B552-E2CC9A19B264}"/>
+                <a16:creationId xmlns:a16="http://schemas.microsoft.com/office/drawing/2014/main" id="{6765BE89-AD72-49B1-B972-EA8FFF328DF6}"/>
               </a:ext>
             </a:extLst>
           </p:cNvPr>
@@ -9223,7 +9231,7 @@
           <p:cNvPr id="3" name="">
             <a:extLst xmlns:a="http://schemas.openxmlformats.org/drawingml/2006/main">
               <a:ext uri="{FF2B5EF4-FFF2-40B4-BE49-F238E27FC236}">
-                <a16:creationId xmlns:a16="http://schemas.microsoft.com/office/drawing/2014/main" id="{0779F267-3977-472F-80F9-2645C3FF30DA}"/>
+                <a16:creationId xmlns:a16="http://schemas.microsoft.com/office/drawing/2014/main" id="{488BE72D-7263-4F91-AC6C-B07CBBD10ECE}"/>
               </a:ext>
             </a:extLst>
           </p:cNvPr>
@@ -9255,7 +9263,7 @@
           <p:cNvPr id="4" name="">
             <a:extLst xmlns:a="http://schemas.openxmlformats.org/drawingml/2006/main">
               <a:ext uri="{FF2B5EF4-FFF2-40B4-BE49-F238E27FC236}">
-                <a16:creationId xmlns:a16="http://schemas.microsoft.com/office/drawing/2014/main" id="{AC0E2AEF-0856-42DA-9E87-9AA80A640959}"/>
+                <a16:creationId xmlns:a16="http://schemas.microsoft.com/office/drawing/2014/main" id="{6DAA1696-693D-44CD-800A-0C483996B0AE}"/>
               </a:ext>
             </a:extLst>
           </p:cNvPr>
@@ -9312,7 +9320,7 @@
           <p:cNvPr id="5" name="">
             <a:extLst xmlns:a="http://schemas.openxmlformats.org/drawingml/2006/main">
               <a:ext uri="{FF2B5EF4-FFF2-40B4-BE49-F238E27FC236}">
-                <a16:creationId xmlns:a16="http://schemas.microsoft.com/office/drawing/2014/main" id="{883C53F7-4B57-4E2E-8EC5-16DF18A8C5CA}"/>
+                <a16:creationId xmlns:a16="http://schemas.microsoft.com/office/drawing/2014/main" id="{03340C7A-FC7B-48D9-AB12-CAFEFF1DE620}"/>
               </a:ext>
             </a:extLst>
           </p:cNvPr>
@@ -9369,7 +9377,7 @@
           <p:cNvPr id="6" name="">
             <a:extLst xmlns:a="http://schemas.openxmlformats.org/drawingml/2006/main">
               <a:ext uri="{FF2B5EF4-FFF2-40B4-BE49-F238E27FC236}">
-                <a16:creationId xmlns:a16="http://schemas.microsoft.com/office/drawing/2014/main" id="{4DB7A1E8-92D7-4C4B-AFCC-F72F40663AF9}"/>
+                <a16:creationId xmlns:a16="http://schemas.microsoft.com/office/drawing/2014/main" id="{94F5E699-E2D9-4581-BE67-3F44799BEF96}"/>
               </a:ext>
             </a:extLst>
           </p:cNvPr>
@@ -9426,7 +9434,7 @@
           <p:cNvPr id="7" name="">
             <a:extLst xmlns:a="http://schemas.openxmlformats.org/drawingml/2006/main">
               <a:ext uri="{FF2B5EF4-FFF2-40B4-BE49-F238E27FC236}">
-                <a16:creationId xmlns:a16="http://schemas.microsoft.com/office/drawing/2014/main" id="{1BF9C6C3-EA61-4B08-985B-6F73DF3A4EEB}"/>
+                <a16:creationId xmlns:a16="http://schemas.microsoft.com/office/drawing/2014/main" id="{E7319AE3-C04F-455A-8FE9-1FDE80A455CE}"/>
               </a:ext>
             </a:extLst>
           </p:cNvPr>
@@ -9458,7 +9466,7 @@
           <p:cNvPr id="8" name="">
             <a:extLst xmlns:a="http://schemas.openxmlformats.org/drawingml/2006/main">
               <a:ext uri="{FF2B5EF4-FFF2-40B4-BE49-F238E27FC236}">
-                <a16:creationId xmlns:a16="http://schemas.microsoft.com/office/drawing/2014/main" id="{7DFA5576-81B4-44C4-AE99-C80F92E39628}"/>
+                <a16:creationId xmlns:a16="http://schemas.microsoft.com/office/drawing/2014/main" id="{C5BA6444-0285-4E5B-BBDF-0462483DBF28}"/>
               </a:ext>
             </a:extLst>
           </p:cNvPr>
@@ -9515,7 +9523,7 @@
           <p:cNvPr id="9" name="">
             <a:extLst xmlns:a="http://schemas.openxmlformats.org/drawingml/2006/main">
               <a:ext uri="{FF2B5EF4-FFF2-40B4-BE49-F238E27FC236}">
-                <a16:creationId xmlns:a16="http://schemas.microsoft.com/office/drawing/2014/main" id="{2977643E-5BC6-4387-8719-DCA784895E04}"/>
+                <a16:creationId xmlns:a16="http://schemas.microsoft.com/office/drawing/2014/main" id="{4FF578F7-4471-44EA-883E-B1F8C131F46C}"/>
               </a:ext>
             </a:extLst>
           </p:cNvPr>
@@ -9572,7 +9580,7 @@
           <p:cNvPr id="10" name="">
             <a:extLst xmlns:a="http://schemas.openxmlformats.org/drawingml/2006/main">
               <a:ext uri="{FF2B5EF4-FFF2-40B4-BE49-F238E27FC236}">
-                <a16:creationId xmlns:a16="http://schemas.microsoft.com/office/drawing/2014/main" id="{EEA03019-DF47-4285-B715-E65DCCE0ECCB}"/>
+                <a16:creationId xmlns:a16="http://schemas.microsoft.com/office/drawing/2014/main" id="{27760737-4688-4DA0-9C47-7016088ACE8C}"/>
               </a:ext>
             </a:extLst>
           </p:cNvPr>
@@ -9629,7 +9637,7 @@
           <p:cNvPr id="11" name="">
             <a:extLst xmlns:a="http://schemas.openxmlformats.org/drawingml/2006/main">
               <a:ext uri="{FF2B5EF4-FFF2-40B4-BE49-F238E27FC236}">
-                <a16:creationId xmlns:a16="http://schemas.microsoft.com/office/drawing/2014/main" id="{DEACCC91-1648-4026-9466-67723AB8B5B3}"/>
+                <a16:creationId xmlns:a16="http://schemas.microsoft.com/office/drawing/2014/main" id="{7793EF82-4B87-48F1-83C6-8535060A72EE}"/>
               </a:ext>
             </a:extLst>
           </p:cNvPr>
@@ -9686,7 +9694,7 @@
           <p:cNvPr id="12" name="">
             <a:extLst xmlns:a="http://schemas.openxmlformats.org/drawingml/2006/main">
               <a:ext uri="{FF2B5EF4-FFF2-40B4-BE49-F238E27FC236}">
-                <a16:creationId xmlns:a16="http://schemas.microsoft.com/office/drawing/2014/main" id="{07BE5290-4C70-4602-88CB-8F272A78FEA3}"/>
+                <a16:creationId xmlns:a16="http://schemas.microsoft.com/office/drawing/2014/main" id="{EF3FEF15-96A6-4854-BFF6-2B596BCD57E4}"/>
               </a:ext>
             </a:extLst>
           </p:cNvPr>
@@ -9718,7 +9726,7 @@
           <p:cNvPr id="13" name="">
             <a:extLst xmlns:a="http://schemas.openxmlformats.org/drawingml/2006/main">
               <a:ext uri="{FF2B5EF4-FFF2-40B4-BE49-F238E27FC236}">
-                <a16:creationId xmlns:a16="http://schemas.microsoft.com/office/drawing/2014/main" id="{B103A12A-1BF9-4A8B-ABE5-DBC73860C32F}"/>
+                <a16:creationId xmlns:a16="http://schemas.microsoft.com/office/drawing/2014/main" id="{2EB2A1C5-E295-4FD0-AC55-C85A4F5E5C48}"/>
               </a:ext>
             </a:extLst>
           </p:cNvPr>
@@ -9775,7 +9783,7 @@
           <p:cNvPr id="14" name="">
             <a:extLst xmlns:a="http://schemas.openxmlformats.org/drawingml/2006/main">
               <a:ext uri="{FF2B5EF4-FFF2-40B4-BE49-F238E27FC236}">
-                <a16:creationId xmlns:a16="http://schemas.microsoft.com/office/drawing/2014/main" id="{4987E0C9-A340-4C36-80B1-01F6F8F08516}"/>
+                <a16:creationId xmlns:a16="http://schemas.microsoft.com/office/drawing/2014/main" id="{6ABDC848-0B70-4604-845E-C1D06B9927D2}"/>
               </a:ext>
             </a:extLst>
           </p:cNvPr>
@@ -9830,7 +9838,7 @@
     </p:spTree>
     <p:extLst>
       <p:ext uri="{BB962C8B-B14F-4D97-AF65-F5344CB8AC3E}">
-        <p14:creationId xmlns:p14="http://schemas.microsoft.com/office/powerpoint/2010/main" val="1504407445"/>
+        <p14:creationId xmlns:p14="http://schemas.microsoft.com/office/powerpoint/2010/main" val="546072989"/>
       </p:ext>
     </p:extLst>
   </p:cSld>
@@ -10031,7 +10039,7 @@
           <p:cNvPr id="16" name="">
             <a:extLst xmlns:a="http://schemas.openxmlformats.org/drawingml/2006/main">
               <a:ext uri="{FF2B5EF4-FFF2-40B4-BE49-F238E27FC236}">
-                <a16:creationId xmlns:a16="http://schemas.microsoft.com/office/drawing/2014/main" id="{F6A191E6-E66E-4F31-86AE-6F1FBA6453B3}"/>
+                <a16:creationId xmlns:a16="http://schemas.microsoft.com/office/drawing/2014/main" id="{F51773F7-5DAA-4FE8-9CA4-279471511C8C}"/>
               </a:ext>
             </a:extLst>
           </p:cNvPr>
@@ -10063,7 +10071,7 @@
           <p:cNvPr id="2" name="">
             <a:extLst xmlns:a="http://schemas.openxmlformats.org/drawingml/2006/main">
               <a:ext uri="{FF2B5EF4-FFF2-40B4-BE49-F238E27FC236}">
-                <a16:creationId xmlns:a16="http://schemas.microsoft.com/office/drawing/2014/main" id="{B19F9D1B-CD24-43D2-8A49-2AEB4628D990}"/>
+                <a16:creationId xmlns:a16="http://schemas.microsoft.com/office/drawing/2014/main" id="{2ADFB47B-6C8B-434A-A2B2-50659A7F3335}"/>
               </a:ext>
             </a:extLst>
           </p:cNvPr>
@@ -10120,7 +10128,7 @@
           <p:cNvPr id="3" name="">
             <a:extLst xmlns:a="http://schemas.openxmlformats.org/drawingml/2006/main">
               <a:ext uri="{FF2B5EF4-FFF2-40B4-BE49-F238E27FC236}">
-                <a16:creationId xmlns:a16="http://schemas.microsoft.com/office/drawing/2014/main" id="{6AB53759-A279-4072-B6A1-F64B3FC304C7}"/>
+                <a16:creationId xmlns:a16="http://schemas.microsoft.com/office/drawing/2014/main" id="{DAB4A6BB-9CA5-42B6-AEE4-CAB821BB051A}"/>
               </a:ext>
             </a:extLst>
           </p:cNvPr>
@@ -10152,7 +10160,7 @@
           <p:cNvPr id="4" name="">
             <a:extLst xmlns:a="http://schemas.openxmlformats.org/drawingml/2006/main">
               <a:ext uri="{FF2B5EF4-FFF2-40B4-BE49-F238E27FC236}">
-                <a16:creationId xmlns:a16="http://schemas.microsoft.com/office/drawing/2014/main" id="{3F754C72-DB6C-4846-BF82-F5B633B0EE62}"/>
+                <a16:creationId xmlns:a16="http://schemas.microsoft.com/office/drawing/2014/main" id="{37B7774F-0897-490F-9422-2501C6068060}"/>
               </a:ext>
             </a:extLst>
           </p:cNvPr>
@@ -10209,7 +10217,7 @@
           <p:cNvPr id="5" name="">
             <a:extLst xmlns:a="http://schemas.openxmlformats.org/drawingml/2006/main">
               <a:ext uri="{FF2B5EF4-FFF2-40B4-BE49-F238E27FC236}">
-                <a16:creationId xmlns:a16="http://schemas.microsoft.com/office/drawing/2014/main" id="{98E50F46-30ED-4344-9991-FADD0460DDA7}"/>
+                <a16:creationId xmlns:a16="http://schemas.microsoft.com/office/drawing/2014/main" id="{FFA7D646-57FA-41A8-B669-06AF0F090CE4}"/>
               </a:ext>
             </a:extLst>
           </p:cNvPr>
@@ -10266,7 +10274,7 @@
           <p:cNvPr id="6" name="">
             <a:extLst xmlns:a="http://schemas.openxmlformats.org/drawingml/2006/main">
               <a:ext uri="{FF2B5EF4-FFF2-40B4-BE49-F238E27FC236}">
-                <a16:creationId xmlns:a16="http://schemas.microsoft.com/office/drawing/2014/main" id="{EEC908BA-6874-41E2-82EE-819D6DAACC0B}"/>
+                <a16:creationId xmlns:a16="http://schemas.microsoft.com/office/drawing/2014/main" id="{06E63333-B92A-47F0-BAF7-7BDCDCD3F77A}"/>
               </a:ext>
             </a:extLst>
           </p:cNvPr>
@@ -10323,7 +10331,7 @@
           <p:cNvPr id="7" name="">
             <a:extLst xmlns:a="http://schemas.openxmlformats.org/drawingml/2006/main">
               <a:ext uri="{FF2B5EF4-FFF2-40B4-BE49-F238E27FC236}">
-                <a16:creationId xmlns:a16="http://schemas.microsoft.com/office/drawing/2014/main" id="{38E398AD-5D27-4FCB-BB5B-D60BA54D1140}"/>
+                <a16:creationId xmlns:a16="http://schemas.microsoft.com/office/drawing/2014/main" id="{2955B1B8-0BFE-4C0A-A991-815C7D70809D}"/>
               </a:ext>
             </a:extLst>
           </p:cNvPr>
@@ -10355,7 +10363,7 @@
           <p:cNvPr id="8" name="">
             <a:extLst xmlns:a="http://schemas.openxmlformats.org/drawingml/2006/main">
               <a:ext uri="{FF2B5EF4-FFF2-40B4-BE49-F238E27FC236}">
-                <a16:creationId xmlns:a16="http://schemas.microsoft.com/office/drawing/2014/main" id="{D4E91A9B-02C5-4782-A59F-3F4878A33631}"/>
+                <a16:creationId xmlns:a16="http://schemas.microsoft.com/office/drawing/2014/main" id="{9DD8CA70-4146-443A-9FAD-38FE2EB22E21}"/>
               </a:ext>
             </a:extLst>
           </p:cNvPr>
@@ -10412,7 +10420,7 @@
           <p:cNvPr id="9" name="">
             <a:extLst xmlns:a="http://schemas.openxmlformats.org/drawingml/2006/main">
               <a:ext uri="{FF2B5EF4-FFF2-40B4-BE49-F238E27FC236}">
-                <a16:creationId xmlns:a16="http://schemas.microsoft.com/office/drawing/2014/main" id="{2E21FA99-BA21-4BB4-9290-D0B5031EC80B}"/>
+                <a16:creationId xmlns:a16="http://schemas.microsoft.com/office/drawing/2014/main" id="{9811E1EB-608B-4E64-8D5F-BAF82AD7A1F2}"/>
               </a:ext>
             </a:extLst>
           </p:cNvPr>
@@ -10469,7 +10477,7 @@
           <p:cNvPr id="10" name="">
             <a:extLst xmlns:a="http://schemas.openxmlformats.org/drawingml/2006/main">
               <a:ext uri="{FF2B5EF4-FFF2-40B4-BE49-F238E27FC236}">
-                <a16:creationId xmlns:a16="http://schemas.microsoft.com/office/drawing/2014/main" id="{CF1E1E03-1F64-494B-B489-5F9899DB17B5}"/>
+                <a16:creationId xmlns:a16="http://schemas.microsoft.com/office/drawing/2014/main" id="{6851A2F5-0E51-42B5-8194-2595ED5445AA}"/>
               </a:ext>
             </a:extLst>
           </p:cNvPr>
@@ -10526,7 +10534,7 @@
           <p:cNvPr id="11" name="">
             <a:extLst xmlns:a="http://schemas.openxmlformats.org/drawingml/2006/main">
               <a:ext uri="{FF2B5EF4-FFF2-40B4-BE49-F238E27FC236}">
-                <a16:creationId xmlns:a16="http://schemas.microsoft.com/office/drawing/2014/main" id="{2DF80B30-C4E3-4D1C-B230-72C8998C7932}"/>
+                <a16:creationId xmlns:a16="http://schemas.microsoft.com/office/drawing/2014/main" id="{6FCAA009-DF34-46FE-B151-835CE6BA79DD}"/>
               </a:ext>
             </a:extLst>
           </p:cNvPr>
@@ -10583,7 +10591,7 @@
           <p:cNvPr id="12" name="">
             <a:extLst xmlns:a="http://schemas.openxmlformats.org/drawingml/2006/main">
               <a:ext uri="{FF2B5EF4-FFF2-40B4-BE49-F238E27FC236}">
-                <a16:creationId xmlns:a16="http://schemas.microsoft.com/office/drawing/2014/main" id="{232DEF12-6459-4AA8-8921-9AFE366FD934}"/>
+                <a16:creationId xmlns:a16="http://schemas.microsoft.com/office/drawing/2014/main" id="{5BB98AB9-6422-4C94-A767-49014BE4AE48}"/>
               </a:ext>
             </a:extLst>
           </p:cNvPr>
@@ -10640,7 +10648,7 @@
           <p:cNvPr id="13" name="">
             <a:extLst xmlns:a="http://schemas.openxmlformats.org/drawingml/2006/main">
               <a:ext uri="{FF2B5EF4-FFF2-40B4-BE49-F238E27FC236}">
-                <a16:creationId xmlns:a16="http://schemas.microsoft.com/office/drawing/2014/main" id="{9AE82531-5B9B-43BB-B3E2-AC071D965770}"/>
+                <a16:creationId xmlns:a16="http://schemas.microsoft.com/office/drawing/2014/main" id="{7FE6BD88-8E79-4F0B-9FE1-DA4E7EF1232E}"/>
               </a:ext>
             </a:extLst>
           </p:cNvPr>
@@ -10697,7 +10705,7 @@
           <p:cNvPr id="14" name="">
             <a:extLst xmlns:a="http://schemas.openxmlformats.org/drawingml/2006/main">
               <a:ext uri="{FF2B5EF4-FFF2-40B4-BE49-F238E27FC236}">
-                <a16:creationId xmlns:a16="http://schemas.microsoft.com/office/drawing/2014/main" id="{2A510EA2-5DD8-4CE7-A852-83698157E0FB}"/>
+                <a16:creationId xmlns:a16="http://schemas.microsoft.com/office/drawing/2014/main" id="{065AA7AA-29BC-4331-BE0D-B0A0B30B7AB4}"/>
               </a:ext>
             </a:extLst>
           </p:cNvPr>
@@ -10754,7 +10762,7 @@
           <p:cNvPr id="15" name="">
             <a:extLst xmlns:a="http://schemas.openxmlformats.org/drawingml/2006/main">
               <a:ext uri="{FF2B5EF4-FFF2-40B4-BE49-F238E27FC236}">
-                <a16:creationId xmlns:a16="http://schemas.microsoft.com/office/drawing/2014/main" id="{76BBB768-CC5E-46A5-880F-46922E300BB1}"/>
+                <a16:creationId xmlns:a16="http://schemas.microsoft.com/office/drawing/2014/main" id="{43D475FC-614B-4964-90D0-514849ED553B}"/>
               </a:ext>
             </a:extLst>
           </p:cNvPr>
@@ -10809,7 +10817,7 @@
     </p:spTree>
     <p:extLst>
       <p:ext uri="{BB962C8B-B14F-4D97-AF65-F5344CB8AC3E}">
-        <p14:creationId xmlns:p14="http://schemas.microsoft.com/office/powerpoint/2010/main" val="313768603"/>
+        <p14:creationId xmlns:p14="http://schemas.microsoft.com/office/powerpoint/2010/main" val="1199757725"/>
       </p:ext>
     </p:extLst>
   </p:cSld>
@@ -10964,7 +10972,7 @@
           <p:cNvPr id="16" name="">
             <a:extLst xmlns:a="http://schemas.openxmlformats.org/drawingml/2006/main">
               <a:ext uri="{FF2B5EF4-FFF2-40B4-BE49-F238E27FC236}">
-                <a16:creationId xmlns:a16="http://schemas.microsoft.com/office/drawing/2014/main" id="{19D22A7A-5F71-43D2-926A-3269FB4486A7}"/>
+                <a16:creationId xmlns:a16="http://schemas.microsoft.com/office/drawing/2014/main" id="{16F1A731-DDDA-4CA8-A603-03BB6299CBB3}"/>
               </a:ext>
             </a:extLst>
           </p:cNvPr>
@@ -10996,7 +11004,7 @@
           <p:cNvPr id="2" name="">
             <a:extLst xmlns:a="http://schemas.openxmlformats.org/drawingml/2006/main">
               <a:ext uri="{FF2B5EF4-FFF2-40B4-BE49-F238E27FC236}">
-                <a16:creationId xmlns:a16="http://schemas.microsoft.com/office/drawing/2014/main" id="{FFBA7F52-29DD-43DF-8E32-EC9E25860D66}"/>
+                <a16:creationId xmlns:a16="http://schemas.microsoft.com/office/drawing/2014/main" id="{7E6EB0C7-B918-4C48-AEDD-8D388665FA73}"/>
               </a:ext>
             </a:extLst>
           </p:cNvPr>
@@ -11053,7 +11061,7 @@
           <p:cNvPr id="3" name="">
             <a:extLst xmlns:a="http://schemas.openxmlformats.org/drawingml/2006/main">
               <a:ext uri="{FF2B5EF4-FFF2-40B4-BE49-F238E27FC236}">
-                <a16:creationId xmlns:a16="http://schemas.microsoft.com/office/drawing/2014/main" id="{38710B90-FE3D-4AAA-9A8D-8C069C5DE57F}"/>
+                <a16:creationId xmlns:a16="http://schemas.microsoft.com/office/drawing/2014/main" id="{D25AA577-00BE-401D-8874-00C2BC9BB086}"/>
               </a:ext>
             </a:extLst>
           </p:cNvPr>
@@ -11085,7 +11093,7 @@
           <p:cNvPr id="4" name="">
             <a:extLst xmlns:a="http://schemas.openxmlformats.org/drawingml/2006/main">
               <a:ext uri="{FF2B5EF4-FFF2-40B4-BE49-F238E27FC236}">
-                <a16:creationId xmlns:a16="http://schemas.microsoft.com/office/drawing/2014/main" id="{3C2CCA0F-7FBA-4EC3-B14B-2014E32348B9}"/>
+                <a16:creationId xmlns:a16="http://schemas.microsoft.com/office/drawing/2014/main" id="{D9FD0EC0-2AB7-4BA3-A043-EF0373953D67}"/>
               </a:ext>
             </a:extLst>
           </p:cNvPr>
@@ -11142,7 +11150,7 @@
           <p:cNvPr id="5" name="">
             <a:extLst xmlns:a="http://schemas.openxmlformats.org/drawingml/2006/main">
               <a:ext uri="{FF2B5EF4-FFF2-40B4-BE49-F238E27FC236}">
-                <a16:creationId xmlns:a16="http://schemas.microsoft.com/office/drawing/2014/main" id="{620953F0-03CC-4ABA-941C-5279D3AA6688}"/>
+                <a16:creationId xmlns:a16="http://schemas.microsoft.com/office/drawing/2014/main" id="{6A6D4B87-BE89-4347-BD48-1738568ADD68}"/>
               </a:ext>
             </a:extLst>
           </p:cNvPr>
@@ -11199,7 +11207,7 @@
           <p:cNvPr id="6" name="">
             <a:extLst xmlns:a="http://schemas.openxmlformats.org/drawingml/2006/main">
               <a:ext uri="{FF2B5EF4-FFF2-40B4-BE49-F238E27FC236}">
-                <a16:creationId xmlns:a16="http://schemas.microsoft.com/office/drawing/2014/main" id="{B530CD0F-C3B1-4A4F-B70A-E00BF53E7605}"/>
+                <a16:creationId xmlns:a16="http://schemas.microsoft.com/office/drawing/2014/main" id="{0591B103-5C0B-4ED8-9158-B15DD301810A}"/>
               </a:ext>
             </a:extLst>
           </p:cNvPr>
@@ -11256,7 +11264,7 @@
           <p:cNvPr id="7" name="">
             <a:extLst xmlns:a="http://schemas.openxmlformats.org/drawingml/2006/main">
               <a:ext uri="{FF2B5EF4-FFF2-40B4-BE49-F238E27FC236}">
-                <a16:creationId xmlns:a16="http://schemas.microsoft.com/office/drawing/2014/main" id="{CA95E2C9-7EFF-470D-A117-A14B57D025E2}"/>
+                <a16:creationId xmlns:a16="http://schemas.microsoft.com/office/drawing/2014/main" id="{2E3DF650-A263-48FB-A233-50BFB0E9EFEF}"/>
               </a:ext>
             </a:extLst>
           </p:cNvPr>
@@ -11288,7 +11296,7 @@
           <p:cNvPr id="8" name="">
             <a:extLst xmlns:a="http://schemas.openxmlformats.org/drawingml/2006/main">
               <a:ext uri="{FF2B5EF4-FFF2-40B4-BE49-F238E27FC236}">
-                <a16:creationId xmlns:a16="http://schemas.microsoft.com/office/drawing/2014/main" id="{0B25CE15-EABF-41F6-B0B2-152D51761C0B}"/>
+                <a16:creationId xmlns:a16="http://schemas.microsoft.com/office/drawing/2014/main" id="{4D5D198F-066C-4DC8-ACBB-0823331ECF69}"/>
               </a:ext>
             </a:extLst>
           </p:cNvPr>
@@ -11345,7 +11353,7 @@
           <p:cNvPr id="9" name="">
             <a:extLst xmlns:a="http://schemas.openxmlformats.org/drawingml/2006/main">
               <a:ext uri="{FF2B5EF4-FFF2-40B4-BE49-F238E27FC236}">
-                <a16:creationId xmlns:a16="http://schemas.microsoft.com/office/drawing/2014/main" id="{0A65AC2F-A654-4530-8A05-93573B01737A}"/>
+                <a16:creationId xmlns:a16="http://schemas.microsoft.com/office/drawing/2014/main" id="{C757CF20-FE20-4D6A-AF92-6C461DA6A2A2}"/>
               </a:ext>
             </a:extLst>
           </p:cNvPr>
@@ -11406,7 +11414,7 @@
           <p:nvPr/>
         </p:nvPicPr>
         <p:blipFill>
-          <a:blip xmlns:r="http://schemas.openxmlformats.org/officeDocument/2006/relationships" xmlns:a="http://schemas.openxmlformats.org/drawingml/2006/main" r:embed="R0ad8600095284533"/>
+          <a:blip xmlns:r="http://schemas.openxmlformats.org/officeDocument/2006/relationships" xmlns:a="http://schemas.openxmlformats.org/drawingml/2006/main" r:embed="Rcb5a333d35494d70"/>
           <a:stretch xmlns:a="http://schemas.openxmlformats.org/drawingml/2006/main"/>
         </p:blipFill>
         <p:spPr>
@@ -11424,7 +11432,7 @@
           <p:cNvPr id="11" name="">
             <a:extLst xmlns:a="http://schemas.openxmlformats.org/drawingml/2006/main">
               <a:ext uri="{FF2B5EF4-FFF2-40B4-BE49-F238E27FC236}">
-                <a16:creationId xmlns:a16="http://schemas.microsoft.com/office/drawing/2014/main" id="{3B050167-8606-476C-B6B7-EDA4DD6B44AF}"/>
+                <a16:creationId xmlns:a16="http://schemas.microsoft.com/office/drawing/2014/main" id="{0BD024EE-DB2E-4BD2-A286-3C491F73DB01}"/>
               </a:ext>
             </a:extLst>
           </p:cNvPr>
@@ -11481,7 +11489,7 @@
           <p:cNvPr id="12" name="">
             <a:extLst xmlns:a="http://schemas.openxmlformats.org/drawingml/2006/main">
               <a:ext uri="{FF2B5EF4-FFF2-40B4-BE49-F238E27FC236}">
-                <a16:creationId xmlns:a16="http://schemas.microsoft.com/office/drawing/2014/main" id="{522B45D0-C6E3-4B3A-A90C-1588893C08F1}"/>
+                <a16:creationId xmlns:a16="http://schemas.microsoft.com/office/drawing/2014/main" id="{E116DF2C-1A75-4170-9F79-65BEF4ED765E}"/>
               </a:ext>
             </a:extLst>
           </p:cNvPr>
@@ -11538,7 +11546,7 @@
           <p:cNvPr id="13" name="">
             <a:extLst xmlns:a="http://schemas.openxmlformats.org/drawingml/2006/main">
               <a:ext uri="{FF2B5EF4-FFF2-40B4-BE49-F238E27FC236}">
-                <a16:creationId xmlns:a16="http://schemas.microsoft.com/office/drawing/2014/main" id="{4138E0B8-2D84-427A-A762-A0B82078EBCB}"/>
+                <a16:creationId xmlns:a16="http://schemas.microsoft.com/office/drawing/2014/main" id="{FBD8B95F-EF2E-467C-9029-4ABDBBAE685C}"/>
               </a:ext>
             </a:extLst>
           </p:cNvPr>
@@ -11570,7 +11578,7 @@
           <p:cNvPr id="14" name="">
             <a:extLst xmlns:a="http://schemas.openxmlformats.org/drawingml/2006/main">
               <a:ext uri="{FF2B5EF4-FFF2-40B4-BE49-F238E27FC236}">
-                <a16:creationId xmlns:a16="http://schemas.microsoft.com/office/drawing/2014/main" id="{4CB00ABC-4A4E-4180-B770-F33948494A44}"/>
+                <a16:creationId xmlns:a16="http://schemas.microsoft.com/office/drawing/2014/main" id="{8A15A1C4-5069-4987-A088-3139463E0F2A}"/>
               </a:ext>
             </a:extLst>
           </p:cNvPr>
@@ -11627,7 +11635,7 @@
           <p:cNvPr id="15" name="">
             <a:extLst xmlns:a="http://schemas.openxmlformats.org/drawingml/2006/main">
               <a:ext uri="{FF2B5EF4-FFF2-40B4-BE49-F238E27FC236}">
-                <a16:creationId xmlns:a16="http://schemas.microsoft.com/office/drawing/2014/main" id="{58BD6271-9B2D-45BC-A20A-549B1A6AB089}"/>
+                <a16:creationId xmlns:a16="http://schemas.microsoft.com/office/drawing/2014/main" id="{F3CE629B-B63D-4719-B21A-E21E25F7B6C1}"/>
               </a:ext>
             </a:extLst>
           </p:cNvPr>
@@ -11682,7 +11690,7 @@
     </p:spTree>
     <p:extLst>
       <p:ext uri="{BB962C8B-B14F-4D97-AF65-F5344CB8AC3E}">
-        <p14:creationId xmlns:p14="http://schemas.microsoft.com/office/powerpoint/2010/main" val="648108251"/>
+        <p14:creationId xmlns:p14="http://schemas.microsoft.com/office/powerpoint/2010/main" val="542905486"/>
       </p:ext>
     </p:extLst>
   </p:cSld>
@@ -11837,7 +11845,7 @@
           <p:cNvPr id="23" name="">
             <a:extLst xmlns:a="http://schemas.openxmlformats.org/drawingml/2006/main">
               <a:ext uri="{FF2B5EF4-FFF2-40B4-BE49-F238E27FC236}">
-                <a16:creationId xmlns:a16="http://schemas.microsoft.com/office/drawing/2014/main" id="{940172D0-AE3A-4114-8709-91F3FA22FFA2}"/>
+                <a16:creationId xmlns:a16="http://schemas.microsoft.com/office/drawing/2014/main" id="{FE2B6F26-F94C-404E-A9A2-DF92E58AED60}"/>
               </a:ext>
             </a:extLst>
           </p:cNvPr>
@@ -11869,7 +11877,7 @@
           <p:cNvPr id="2" name="">
             <a:extLst xmlns:a="http://schemas.openxmlformats.org/drawingml/2006/main">
               <a:ext uri="{FF2B5EF4-FFF2-40B4-BE49-F238E27FC236}">
-                <a16:creationId xmlns:a16="http://schemas.microsoft.com/office/drawing/2014/main" id="{D5A0185B-A42B-4BFB-BF30-A1D5906A9E47}"/>
+                <a16:creationId xmlns:a16="http://schemas.microsoft.com/office/drawing/2014/main" id="{E8ED87C3-4B07-4CF0-BBC5-3F21AF545D2D}"/>
               </a:ext>
             </a:extLst>
           </p:cNvPr>
@@ -11926,7 +11934,7 @@
           <p:cNvPr id="3" name="">
             <a:extLst xmlns:a="http://schemas.openxmlformats.org/drawingml/2006/main">
               <a:ext uri="{FF2B5EF4-FFF2-40B4-BE49-F238E27FC236}">
-                <a16:creationId xmlns:a16="http://schemas.microsoft.com/office/drawing/2014/main" id="{4B4EA2A4-F7DA-45F3-A233-4FA19417B4F3}"/>
+                <a16:creationId xmlns:a16="http://schemas.microsoft.com/office/drawing/2014/main" id="{D98817BE-431D-4744-9400-C1D84AC328C3}"/>
               </a:ext>
             </a:extLst>
           </p:cNvPr>
@@ -11958,7 +11966,7 @@
           <p:cNvPr id="4" name="">
             <a:extLst xmlns:a="http://schemas.openxmlformats.org/drawingml/2006/main">
               <a:ext uri="{FF2B5EF4-FFF2-40B4-BE49-F238E27FC236}">
-                <a16:creationId xmlns:a16="http://schemas.microsoft.com/office/drawing/2014/main" id="{C1FD560D-6C2D-4E3F-9E48-C702502CE077}"/>
+                <a16:creationId xmlns:a16="http://schemas.microsoft.com/office/drawing/2014/main" id="{12D1D78A-68F0-46A7-BCE9-0E5FC3A7A7E0}"/>
               </a:ext>
             </a:extLst>
           </p:cNvPr>
@@ -12015,7 +12023,7 @@
           <p:cNvPr id="5" name="">
             <a:extLst xmlns:a="http://schemas.openxmlformats.org/drawingml/2006/main">
               <a:ext uri="{FF2B5EF4-FFF2-40B4-BE49-F238E27FC236}">
-                <a16:creationId xmlns:a16="http://schemas.microsoft.com/office/drawing/2014/main" id="{3F1BF507-9A17-4798-842B-D77D2AFB5B58}"/>
+                <a16:creationId xmlns:a16="http://schemas.microsoft.com/office/drawing/2014/main" id="{7DDF0199-8568-4A0F-97BB-FD9318E5E724}"/>
               </a:ext>
             </a:extLst>
           </p:cNvPr>
@@ -12072,7 +12080,7 @@
           <p:cNvPr id="6" name="">
             <a:extLst xmlns:a="http://schemas.openxmlformats.org/drawingml/2006/main">
               <a:ext uri="{FF2B5EF4-FFF2-40B4-BE49-F238E27FC236}">
-                <a16:creationId xmlns:a16="http://schemas.microsoft.com/office/drawing/2014/main" id="{D301D573-E7A4-4E79-9BCD-3CFD59462238}"/>
+                <a16:creationId xmlns:a16="http://schemas.microsoft.com/office/drawing/2014/main" id="{5634BAA2-E8C6-4A50-B40C-D1DD86C7AEA3}"/>
               </a:ext>
             </a:extLst>
           </p:cNvPr>
@@ -12129,7 +12137,7 @@
           <p:cNvPr id="7" name="">
             <a:extLst xmlns:a="http://schemas.openxmlformats.org/drawingml/2006/main">
               <a:ext uri="{FF2B5EF4-FFF2-40B4-BE49-F238E27FC236}">
-                <a16:creationId xmlns:a16="http://schemas.microsoft.com/office/drawing/2014/main" id="{EAAEA83C-5FC5-4CC6-9C60-ADFB422CCDFF}"/>
+                <a16:creationId xmlns:a16="http://schemas.microsoft.com/office/drawing/2014/main" id="{CDC83AC2-F2FF-4149-BFAA-18F8A1CDCB00}"/>
               </a:ext>
             </a:extLst>
           </p:cNvPr>
@@ -12161,7 +12169,7 @@
           <p:cNvPr id="8" name="">
             <a:extLst xmlns:a="http://schemas.openxmlformats.org/drawingml/2006/main">
               <a:ext uri="{FF2B5EF4-FFF2-40B4-BE49-F238E27FC236}">
-                <a16:creationId xmlns:a16="http://schemas.microsoft.com/office/drawing/2014/main" id="{30E82BBB-BDE5-4C94-B6F6-792E2A01DF6A}"/>
+                <a16:creationId xmlns:a16="http://schemas.microsoft.com/office/drawing/2014/main" id="{9A5F6374-E406-483F-9ABA-4578C6B646EF}"/>
               </a:ext>
             </a:extLst>
           </p:cNvPr>
@@ -12218,7 +12226,7 @@
           <p:cNvPr id="9" name="">
             <a:extLst xmlns:a="http://schemas.openxmlformats.org/drawingml/2006/main">
               <a:ext uri="{FF2B5EF4-FFF2-40B4-BE49-F238E27FC236}">
-                <a16:creationId xmlns:a16="http://schemas.microsoft.com/office/drawing/2014/main" id="{CA8E07AA-DA4C-4D98-9E02-4CC1503EE8FE}"/>
+                <a16:creationId xmlns:a16="http://schemas.microsoft.com/office/drawing/2014/main" id="{7E282830-01FF-40C3-A222-9A9CAFB7990F}"/>
               </a:ext>
             </a:extLst>
           </p:cNvPr>
@@ -12275,7 +12283,7 @@
           <p:cNvPr id="10" name="">
             <a:extLst xmlns:a="http://schemas.openxmlformats.org/drawingml/2006/main">
               <a:ext uri="{FF2B5EF4-FFF2-40B4-BE49-F238E27FC236}">
-                <a16:creationId xmlns:a16="http://schemas.microsoft.com/office/drawing/2014/main" id="{ECB14A06-1632-49B1-BF46-9079A4F6E735}"/>
+                <a16:creationId xmlns:a16="http://schemas.microsoft.com/office/drawing/2014/main" id="{052855C9-CE6B-4E0D-BEC1-13FD8D5B56A6}"/>
               </a:ext>
             </a:extLst>
           </p:cNvPr>
@@ -12309,7 +12317,7 @@
           <p:cNvPr id="11" name="">
             <a:extLst xmlns:a="http://schemas.openxmlformats.org/drawingml/2006/main">
               <a:ext uri="{FF2B5EF4-FFF2-40B4-BE49-F238E27FC236}">
-                <a16:creationId xmlns:a16="http://schemas.microsoft.com/office/drawing/2014/main" id="{C7E2CED6-CEB1-471D-BAEA-E948D157395F}"/>
+                <a16:creationId xmlns:a16="http://schemas.microsoft.com/office/drawing/2014/main" id="{B1C51E56-27CB-4FE5-A5FC-3948BAE178D0}"/>
               </a:ext>
             </a:extLst>
           </p:cNvPr>
@@ -12341,7 +12349,7 @@
           <p:cNvPr id="12" name="">
             <a:extLst xmlns:a="http://schemas.openxmlformats.org/drawingml/2006/main">
               <a:ext uri="{FF2B5EF4-FFF2-40B4-BE49-F238E27FC236}">
-                <a16:creationId xmlns:a16="http://schemas.microsoft.com/office/drawing/2014/main" id="{C4731243-DD2F-4383-8E03-86270B2D2751}"/>
+                <a16:creationId xmlns:a16="http://schemas.microsoft.com/office/drawing/2014/main" id="{2C97D6D8-BB88-4F41-AA24-77AE82F6135E}"/>
               </a:ext>
             </a:extLst>
           </p:cNvPr>
@@ -12398,7 +12406,7 @@
           <p:cNvPr id="13" name="">
             <a:extLst xmlns:a="http://schemas.openxmlformats.org/drawingml/2006/main">
               <a:ext uri="{FF2B5EF4-FFF2-40B4-BE49-F238E27FC236}">
-                <a16:creationId xmlns:a16="http://schemas.microsoft.com/office/drawing/2014/main" id="{5FA2C203-5132-4EF6-B3C8-F6CA25B0E232}"/>
+                <a16:creationId xmlns:a16="http://schemas.microsoft.com/office/drawing/2014/main" id="{0ACC97DE-BE14-4725-A04B-8843118A6BDE}"/>
               </a:ext>
             </a:extLst>
           </p:cNvPr>
@@ -12455,7 +12463,7 @@
           <p:cNvPr id="14" name="">
             <a:extLst xmlns:a="http://schemas.openxmlformats.org/drawingml/2006/main">
               <a:ext uri="{FF2B5EF4-FFF2-40B4-BE49-F238E27FC236}">
-                <a16:creationId xmlns:a16="http://schemas.microsoft.com/office/drawing/2014/main" id="{EB6194F6-DA6C-46D5-8ACC-F6373E5AE540}"/>
+                <a16:creationId xmlns:a16="http://schemas.microsoft.com/office/drawing/2014/main" id="{77034BA7-D649-400F-AF82-3E77C8F05B24}"/>
               </a:ext>
             </a:extLst>
           </p:cNvPr>
@@ -12489,7 +12497,7 @@
           <p:cNvPr id="15" name="">
             <a:extLst xmlns:a="http://schemas.openxmlformats.org/drawingml/2006/main">
               <a:ext uri="{FF2B5EF4-FFF2-40B4-BE49-F238E27FC236}">
-                <a16:creationId xmlns:a16="http://schemas.microsoft.com/office/drawing/2014/main" id="{9A295125-96EE-4C5B-A8BC-E48356C68B20}"/>
+                <a16:creationId xmlns:a16="http://schemas.microsoft.com/office/drawing/2014/main" id="{68192F89-CBA3-4DCC-AA29-7BCC129B2FF0}"/>
               </a:ext>
             </a:extLst>
           </p:cNvPr>
@@ -12521,7 +12529,7 @@
           <p:cNvPr id="16" name="">
             <a:extLst xmlns:a="http://schemas.openxmlformats.org/drawingml/2006/main">
               <a:ext uri="{FF2B5EF4-FFF2-40B4-BE49-F238E27FC236}">
-                <a16:creationId xmlns:a16="http://schemas.microsoft.com/office/drawing/2014/main" id="{CE0258E9-B7C5-4187-9CD5-70857E846BF4}"/>
+                <a16:creationId xmlns:a16="http://schemas.microsoft.com/office/drawing/2014/main" id="{9BE6D62E-41DA-476D-ABB8-43B2EB8CA523}"/>
               </a:ext>
             </a:extLst>
           </p:cNvPr>
@@ -12578,7 +12586,7 @@
           <p:cNvPr id="17" name="">
             <a:extLst xmlns:a="http://schemas.openxmlformats.org/drawingml/2006/main">
               <a:ext uri="{FF2B5EF4-FFF2-40B4-BE49-F238E27FC236}">
-                <a16:creationId xmlns:a16="http://schemas.microsoft.com/office/drawing/2014/main" id="{027F164B-A095-46CC-A1AF-BC72F9D6A283}"/>
+                <a16:creationId xmlns:a16="http://schemas.microsoft.com/office/drawing/2014/main" id="{2395E2A6-E717-48FC-B69E-39D97D05904D}"/>
               </a:ext>
             </a:extLst>
           </p:cNvPr>
@@ -12635,7 +12643,7 @@
           <p:cNvPr id="18" name="">
             <a:extLst xmlns:a="http://schemas.openxmlformats.org/drawingml/2006/main">
               <a:ext uri="{FF2B5EF4-FFF2-40B4-BE49-F238E27FC236}">
-                <a16:creationId xmlns:a16="http://schemas.microsoft.com/office/drawing/2014/main" id="{EFFED249-2A5C-42D6-92BC-7D702CA97D5E}"/>
+                <a16:creationId xmlns:a16="http://schemas.microsoft.com/office/drawing/2014/main" id="{E3736BC9-A2C9-4075-B824-0D55A7D2C5D1}"/>
               </a:ext>
             </a:extLst>
           </p:cNvPr>
@@ -12669,7 +12677,7 @@
           <p:cNvPr id="19" name="">
             <a:extLst xmlns:a="http://schemas.openxmlformats.org/drawingml/2006/main">
               <a:ext uri="{FF2B5EF4-FFF2-40B4-BE49-F238E27FC236}">
-                <a16:creationId xmlns:a16="http://schemas.microsoft.com/office/drawing/2014/main" id="{FC8A33AE-F4FE-499D-8D58-EBE9D5A6EE83}"/>
+                <a16:creationId xmlns:a16="http://schemas.microsoft.com/office/drawing/2014/main" id="{37BBEE14-47A4-4C19-BF81-0057588F1C9A}"/>
               </a:ext>
             </a:extLst>
           </p:cNvPr>
@@ -12701,7 +12709,7 @@
           <p:cNvPr id="20" name="">
             <a:extLst xmlns:a="http://schemas.openxmlformats.org/drawingml/2006/main">
               <a:ext uri="{FF2B5EF4-FFF2-40B4-BE49-F238E27FC236}">
-                <a16:creationId xmlns:a16="http://schemas.microsoft.com/office/drawing/2014/main" id="{A6EC424E-A8F7-44D6-B973-0A23853C4689}"/>
+                <a16:creationId xmlns:a16="http://schemas.microsoft.com/office/drawing/2014/main" id="{AB01A5BD-C90D-4F80-B0B0-A9B1FABC78CD}"/>
               </a:ext>
             </a:extLst>
           </p:cNvPr>
@@ -12758,7 +12766,7 @@
           <p:cNvPr id="21" name="">
             <a:extLst xmlns:a="http://schemas.openxmlformats.org/drawingml/2006/main">
               <a:ext uri="{FF2B5EF4-FFF2-40B4-BE49-F238E27FC236}">
-                <a16:creationId xmlns:a16="http://schemas.microsoft.com/office/drawing/2014/main" id="{FD7FCB13-6F4A-413A-A383-7AC5F9B26EDF}"/>
+                <a16:creationId xmlns:a16="http://schemas.microsoft.com/office/drawing/2014/main" id="{4E76944A-B09B-431D-9A48-EFCCDB197D9E}"/>
               </a:ext>
             </a:extLst>
           </p:cNvPr>
@@ -12815,7 +12823,7 @@
           <p:cNvPr id="22" name="">
             <a:extLst xmlns:a="http://schemas.openxmlformats.org/drawingml/2006/main">
               <a:ext uri="{FF2B5EF4-FFF2-40B4-BE49-F238E27FC236}">
-                <a16:creationId xmlns:a16="http://schemas.microsoft.com/office/drawing/2014/main" id="{1560CF05-D85C-4842-8BF3-78CABEA62BCE}"/>
+                <a16:creationId xmlns:a16="http://schemas.microsoft.com/office/drawing/2014/main" id="{A9E57583-5C5D-473B-B737-F62B82A02C98}"/>
               </a:ext>
             </a:extLst>
           </p:cNvPr>
@@ -12870,7 +12878,7 @@
     </p:spTree>
     <p:extLst>
       <p:ext uri="{BB962C8B-B14F-4D97-AF65-F5344CB8AC3E}">
-        <p14:creationId xmlns:p14="http://schemas.microsoft.com/office/powerpoint/2010/main" val="296809035"/>
+        <p14:creationId xmlns:p14="http://schemas.microsoft.com/office/powerpoint/2010/main" val="262554064"/>
       </p:ext>
     </p:extLst>
   </p:cSld>
@@ -13071,7 +13079,7 @@
           <p:cNvPr id="22" name="">
             <a:extLst xmlns:a="http://schemas.openxmlformats.org/drawingml/2006/main">
               <a:ext uri="{FF2B5EF4-FFF2-40B4-BE49-F238E27FC236}">
-                <a16:creationId xmlns:a16="http://schemas.microsoft.com/office/drawing/2014/main" id="{A3FE949F-7BBD-4C44-9C62-EAE9C6D8BFBA}"/>
+                <a16:creationId xmlns:a16="http://schemas.microsoft.com/office/drawing/2014/main" id="{77913457-4C28-4B62-BDDF-885A9C03DA8F}"/>
               </a:ext>
             </a:extLst>
           </p:cNvPr>
@@ -13103,7 +13111,7 @@
           <p:cNvPr id="2" name="">
             <a:extLst xmlns:a="http://schemas.openxmlformats.org/drawingml/2006/main">
               <a:ext uri="{FF2B5EF4-FFF2-40B4-BE49-F238E27FC236}">
-                <a16:creationId xmlns:a16="http://schemas.microsoft.com/office/drawing/2014/main" id="{DC426687-6FC3-4145-B3D6-A6ACC2CB2648}"/>
+                <a16:creationId xmlns:a16="http://schemas.microsoft.com/office/drawing/2014/main" id="{605C1CCE-0EAC-4AD6-BA8A-595605A16DA0}"/>
               </a:ext>
             </a:extLst>
           </p:cNvPr>
@@ -13160,7 +13168,7 @@
           <p:cNvPr id="3" name="">
             <a:extLst xmlns:a="http://schemas.openxmlformats.org/drawingml/2006/main">
               <a:ext uri="{FF2B5EF4-FFF2-40B4-BE49-F238E27FC236}">
-                <a16:creationId xmlns:a16="http://schemas.microsoft.com/office/drawing/2014/main" id="{84F7E08B-5465-4B73-AB92-E8CEDB5DDC5F}"/>
+                <a16:creationId xmlns:a16="http://schemas.microsoft.com/office/drawing/2014/main" id="{A2B035B7-9FCF-4FD6-9FA6-7286BBC932A5}"/>
               </a:ext>
             </a:extLst>
           </p:cNvPr>
@@ -13192,7 +13200,7 @@
           <p:cNvPr id="4" name="">
             <a:extLst xmlns:a="http://schemas.openxmlformats.org/drawingml/2006/main">
               <a:ext uri="{FF2B5EF4-FFF2-40B4-BE49-F238E27FC236}">
-                <a16:creationId xmlns:a16="http://schemas.microsoft.com/office/drawing/2014/main" id="{A921302C-7E8D-4325-A2D3-52CBE302FD46}"/>
+                <a16:creationId xmlns:a16="http://schemas.microsoft.com/office/drawing/2014/main" id="{2F1233AC-26CF-45DA-B858-04801DBCDFC9}"/>
               </a:ext>
             </a:extLst>
           </p:cNvPr>
@@ -13249,7 +13257,7 @@
           <p:cNvPr id="5" name="">
             <a:extLst xmlns:a="http://schemas.openxmlformats.org/drawingml/2006/main">
               <a:ext uri="{FF2B5EF4-FFF2-40B4-BE49-F238E27FC236}">
-                <a16:creationId xmlns:a16="http://schemas.microsoft.com/office/drawing/2014/main" id="{285F5383-038F-4CE5-8EF2-516D2E3B30C4}"/>
+                <a16:creationId xmlns:a16="http://schemas.microsoft.com/office/drawing/2014/main" id="{B59ECEE0-2E6F-4A0D-84BB-47D819C4E449}"/>
               </a:ext>
             </a:extLst>
           </p:cNvPr>
@@ -13306,7 +13314,7 @@
           <p:cNvPr id="6" name="">
             <a:extLst xmlns:a="http://schemas.openxmlformats.org/drawingml/2006/main">
               <a:ext uri="{FF2B5EF4-FFF2-40B4-BE49-F238E27FC236}">
-                <a16:creationId xmlns:a16="http://schemas.microsoft.com/office/drawing/2014/main" id="{24C2F7D7-B7DC-4F60-9CFF-D79D298FCA66}"/>
+                <a16:creationId xmlns:a16="http://schemas.microsoft.com/office/drawing/2014/main" id="{D5A2ACD8-524D-43E3-9821-1D198B1854F2}"/>
               </a:ext>
             </a:extLst>
           </p:cNvPr>
@@ -13363,7 +13371,7 @@
           <p:cNvPr id="7" name="">
             <a:extLst xmlns:a="http://schemas.openxmlformats.org/drawingml/2006/main">
               <a:ext uri="{FF2B5EF4-FFF2-40B4-BE49-F238E27FC236}">
-                <a16:creationId xmlns:a16="http://schemas.microsoft.com/office/drawing/2014/main" id="{4E52A20A-7ECD-41FB-A8A8-2B8AF26847AF}"/>
+                <a16:creationId xmlns:a16="http://schemas.microsoft.com/office/drawing/2014/main" id="{22454071-3EDF-4B20-A242-8F52AD6099EF}"/>
               </a:ext>
             </a:extLst>
           </p:cNvPr>
@@ -13395,7 +13403,7 @@
           <p:cNvPr id="8" name="">
             <a:extLst xmlns:a="http://schemas.openxmlformats.org/drawingml/2006/main">
               <a:ext uri="{FF2B5EF4-FFF2-40B4-BE49-F238E27FC236}">
-                <a16:creationId xmlns:a16="http://schemas.microsoft.com/office/drawing/2014/main" id="{FBC51EA1-D1F6-42E2-BA3E-38507DEC1F5D}"/>
+                <a16:creationId xmlns:a16="http://schemas.microsoft.com/office/drawing/2014/main" id="{98BC4E5E-562D-49EC-BB71-F2BF1AD83EFC}"/>
               </a:ext>
             </a:extLst>
           </p:cNvPr>
@@ -13452,7 +13460,7 @@
           <p:cNvPr id="9" name="">
             <a:extLst xmlns:a="http://schemas.openxmlformats.org/drawingml/2006/main">
               <a:ext uri="{FF2B5EF4-FFF2-40B4-BE49-F238E27FC236}">
-                <a16:creationId xmlns:a16="http://schemas.microsoft.com/office/drawing/2014/main" id="{5149842B-AC16-4969-8C6B-05F5E91C227B}"/>
+                <a16:creationId xmlns:a16="http://schemas.microsoft.com/office/drawing/2014/main" id="{D0AD5C56-3628-46D3-82DA-EF8DCC69A4D5}"/>
               </a:ext>
             </a:extLst>
           </p:cNvPr>
@@ -13509,7 +13517,7 @@
           <p:cNvPr id="10" name="">
             <a:extLst xmlns:a="http://schemas.openxmlformats.org/drawingml/2006/main">
               <a:ext uri="{FF2B5EF4-FFF2-40B4-BE49-F238E27FC236}">
-                <a16:creationId xmlns:a16="http://schemas.microsoft.com/office/drawing/2014/main" id="{5A312080-44AE-43E6-B4D6-E0C7A1210146}"/>
+                <a16:creationId xmlns:a16="http://schemas.microsoft.com/office/drawing/2014/main" id="{BBF7EA98-E4DA-429D-BB23-772E3A71697F}"/>
               </a:ext>
             </a:extLst>
           </p:cNvPr>
@@ -13543,7 +13551,7 @@
           <p:cNvPr id="11" name="">
             <a:extLst xmlns:a="http://schemas.openxmlformats.org/drawingml/2006/main">
               <a:ext uri="{FF2B5EF4-FFF2-40B4-BE49-F238E27FC236}">
-                <a16:creationId xmlns:a16="http://schemas.microsoft.com/office/drawing/2014/main" id="{372C2C11-1F2C-4565-AE0A-279F43B2D8B9}"/>
+                <a16:creationId xmlns:a16="http://schemas.microsoft.com/office/drawing/2014/main" id="{0FE97D1B-0BC3-40E0-8683-982B8929CE5C}"/>
               </a:ext>
             </a:extLst>
           </p:cNvPr>
@@ -13575,7 +13583,7 @@
           <p:cNvPr id="12" name="">
             <a:extLst xmlns:a="http://schemas.openxmlformats.org/drawingml/2006/main">
               <a:ext uri="{FF2B5EF4-FFF2-40B4-BE49-F238E27FC236}">
-                <a16:creationId xmlns:a16="http://schemas.microsoft.com/office/drawing/2014/main" id="{2A076E80-2E3B-4EB0-BFE0-47D0919A72AC}"/>
+                <a16:creationId xmlns:a16="http://schemas.microsoft.com/office/drawing/2014/main" id="{0D90A9AF-61E4-4AE6-917F-E08C2B299D8F}"/>
               </a:ext>
             </a:extLst>
           </p:cNvPr>
@@ -13632,7 +13640,7 @@
           <p:cNvPr id="13" name="">
             <a:extLst xmlns:a="http://schemas.openxmlformats.org/drawingml/2006/main">
               <a:ext uri="{FF2B5EF4-FFF2-40B4-BE49-F238E27FC236}">
-                <a16:creationId xmlns:a16="http://schemas.microsoft.com/office/drawing/2014/main" id="{D14F2A2E-2734-428C-B362-F4C8F1D6DF83}"/>
+                <a16:creationId xmlns:a16="http://schemas.microsoft.com/office/drawing/2014/main" id="{19EA153F-6A62-4EFB-90AA-102340CDB945}"/>
               </a:ext>
             </a:extLst>
           </p:cNvPr>
@@ -13689,7 +13697,7 @@
           <p:cNvPr id="14" name="">
             <a:extLst xmlns:a="http://schemas.openxmlformats.org/drawingml/2006/main">
               <a:ext uri="{FF2B5EF4-FFF2-40B4-BE49-F238E27FC236}">
-                <a16:creationId xmlns:a16="http://schemas.microsoft.com/office/drawing/2014/main" id="{9C11265B-9DBC-4375-AD7F-A534DF327E78}"/>
+                <a16:creationId xmlns:a16="http://schemas.microsoft.com/office/drawing/2014/main" id="{6CD16988-6039-471E-9696-26CF19DF43B5}"/>
               </a:ext>
             </a:extLst>
           </p:cNvPr>
@@ -13723,7 +13731,7 @@
           <p:cNvPr id="15" name="">
             <a:extLst xmlns:a="http://schemas.openxmlformats.org/drawingml/2006/main">
               <a:ext uri="{FF2B5EF4-FFF2-40B4-BE49-F238E27FC236}">
-                <a16:creationId xmlns:a16="http://schemas.microsoft.com/office/drawing/2014/main" id="{7BC2D98E-4AF9-4612-8139-DBDA059EC45E}"/>
+                <a16:creationId xmlns:a16="http://schemas.microsoft.com/office/drawing/2014/main" id="{D4BEEC3F-AE50-4C44-BD59-1F2CCAED694E}"/>
               </a:ext>
             </a:extLst>
           </p:cNvPr>
@@ -13755,7 +13763,7 @@
           <p:cNvPr id="16" name="">
             <a:extLst xmlns:a="http://schemas.openxmlformats.org/drawingml/2006/main">
               <a:ext uri="{FF2B5EF4-FFF2-40B4-BE49-F238E27FC236}">
-                <a16:creationId xmlns:a16="http://schemas.microsoft.com/office/drawing/2014/main" id="{9E42C721-97F3-48A5-9274-2F728B667085}"/>
+                <a16:creationId xmlns:a16="http://schemas.microsoft.com/office/drawing/2014/main" id="{539327EB-24E6-48FE-BD1B-E19ADEF52AA9}"/>
               </a:ext>
             </a:extLst>
           </p:cNvPr>
@@ -13812,7 +13820,7 @@
           <p:cNvPr id="17" name="">
             <a:extLst xmlns:a="http://schemas.openxmlformats.org/drawingml/2006/main">
               <a:ext uri="{FF2B5EF4-FFF2-40B4-BE49-F238E27FC236}">
-                <a16:creationId xmlns:a16="http://schemas.microsoft.com/office/drawing/2014/main" id="{DE560B98-F8F0-4C33-8086-3C13A54B6FCF}"/>
+                <a16:creationId xmlns:a16="http://schemas.microsoft.com/office/drawing/2014/main" id="{9B8CAB02-66CC-46C6-85D4-5001A2DC8DD4}"/>
               </a:ext>
             </a:extLst>
           </p:cNvPr>
@@ -13869,7 +13877,7 @@
           <p:cNvPr id="18" name="">
             <a:extLst xmlns:a="http://schemas.openxmlformats.org/drawingml/2006/main">
               <a:ext uri="{FF2B5EF4-FFF2-40B4-BE49-F238E27FC236}">
-                <a16:creationId xmlns:a16="http://schemas.microsoft.com/office/drawing/2014/main" id="{31848841-D608-425C-AC02-0C215D42D8C8}"/>
+                <a16:creationId xmlns:a16="http://schemas.microsoft.com/office/drawing/2014/main" id="{F419534D-A6D1-44D6-9458-9397ECE69416}"/>
               </a:ext>
             </a:extLst>
           </p:cNvPr>
@@ -13903,7 +13911,7 @@
           <p:cNvPr id="19" name="">
             <a:extLst xmlns:a="http://schemas.openxmlformats.org/drawingml/2006/main">
               <a:ext uri="{FF2B5EF4-FFF2-40B4-BE49-F238E27FC236}">
-                <a16:creationId xmlns:a16="http://schemas.microsoft.com/office/drawing/2014/main" id="{B918EB19-AF73-4986-9CAF-9496444D39AB}"/>
+                <a16:creationId xmlns:a16="http://schemas.microsoft.com/office/drawing/2014/main" id="{1B700587-FAEF-4458-83EB-323DAA15C3AA}"/>
               </a:ext>
             </a:extLst>
           </p:cNvPr>
@@ -13935,7 +13943,7 @@
           <p:cNvPr id="20" name="">
             <a:extLst xmlns:a="http://schemas.openxmlformats.org/drawingml/2006/main">
               <a:ext uri="{FF2B5EF4-FFF2-40B4-BE49-F238E27FC236}">
-                <a16:creationId xmlns:a16="http://schemas.microsoft.com/office/drawing/2014/main" id="{48AA1FA9-B81B-4DA0-84F4-9229521B0B24}"/>
+                <a16:creationId xmlns:a16="http://schemas.microsoft.com/office/drawing/2014/main" id="{EE50DD35-30D5-4345-B416-4360383DB6D2}"/>
               </a:ext>
             </a:extLst>
           </p:cNvPr>
@@ -13992,7 +14000,7 @@
           <p:cNvPr id="21" name="">
             <a:extLst xmlns:a="http://schemas.openxmlformats.org/drawingml/2006/main">
               <a:ext uri="{FF2B5EF4-FFF2-40B4-BE49-F238E27FC236}">
-                <a16:creationId xmlns:a16="http://schemas.microsoft.com/office/drawing/2014/main" id="{FA0005F6-0E24-40C5-B71B-70DBF15ACCC8}"/>
+                <a16:creationId xmlns:a16="http://schemas.microsoft.com/office/drawing/2014/main" id="{C732C59F-243E-4EC1-A765-9495997BEA3C}"/>
               </a:ext>
             </a:extLst>
           </p:cNvPr>
@@ -14047,7 +14055,7 @@
     </p:spTree>
     <p:extLst>
       <p:ext uri="{BB962C8B-B14F-4D97-AF65-F5344CB8AC3E}">
-        <p14:creationId xmlns:p14="http://schemas.microsoft.com/office/powerpoint/2010/main" val="657779231"/>
+        <p14:creationId xmlns:p14="http://schemas.microsoft.com/office/powerpoint/2010/main" val="1855285890"/>
       </p:ext>
     </p:extLst>
   </p:cSld>
